--- a/public/videos/repositories/akira-special/akira-special-tech-preview.pptx
+++ b/public/videos/repositories/akira-special/akira-special-tech-preview.pptx
@@ -134,7 +134,7 @@
           <p:cNvPr id="2" name="タイトル 1">
             <a:extLst>
               <a:ext uri="{FF2B5EF4-FFF2-40B4-BE49-F238E27FC236}">
-                <a16:creationId xmlns:a16="http://schemas.microsoft.com/office/drawing/2014/main" id="{DA59F1BB-F487-D1B0-A887-F0C4DD91ED80}"/>
+                <a16:creationId xmlns:a16="http://schemas.microsoft.com/office/drawing/2014/main" id="{7CB656CE-41A9-E5CD-1BFC-CCA97569712F}"/>
               </a:ext>
             </a:extLst>
           </p:cNvPr>
@@ -171,7 +171,7 @@
           <p:cNvPr id="3" name="字幕 2">
             <a:extLst>
               <a:ext uri="{FF2B5EF4-FFF2-40B4-BE49-F238E27FC236}">
-                <a16:creationId xmlns:a16="http://schemas.microsoft.com/office/drawing/2014/main" id="{2AA31DA5-4CC2-34D2-E093-E470671879A7}"/>
+                <a16:creationId xmlns:a16="http://schemas.microsoft.com/office/drawing/2014/main" id="{162079BB-9671-D69B-9BBF-187706BEE7FF}"/>
               </a:ext>
             </a:extLst>
           </p:cNvPr>
@@ -241,7 +241,7 @@
           <p:cNvPr id="4" name="日付プレースホルダー 3">
             <a:extLst>
               <a:ext uri="{FF2B5EF4-FFF2-40B4-BE49-F238E27FC236}">
-                <a16:creationId xmlns:a16="http://schemas.microsoft.com/office/drawing/2014/main" id="{70BBFA31-AA13-1511-132B-1D0E3DDF3CD8}"/>
+                <a16:creationId xmlns:a16="http://schemas.microsoft.com/office/drawing/2014/main" id="{E87BC618-286F-A02B-3D03-504EE1DFBDDD}"/>
               </a:ext>
             </a:extLst>
           </p:cNvPr>
@@ -257,7 +257,7 @@
           <a:bodyPr/>
           <a:lstStyle/>
           <a:p>
-            <a:fld id="{5C512680-44CC-4CE7-BD28-AA82A0A324C6}" type="datetimeFigureOut">
+            <a:fld id="{3B398E8E-E6C4-45B5-B268-4B5D9A817247}" type="datetimeFigureOut">
               <a:rPr kumimoji="1" lang="ja-JP" altLang="en-US" smtClean="0"/>
               <a:t>2026/7/30</a:t>
             </a:fld>
@@ -270,7 +270,7 @@
           <p:cNvPr id="5" name="フッター プレースホルダー 4">
             <a:extLst>
               <a:ext uri="{FF2B5EF4-FFF2-40B4-BE49-F238E27FC236}">
-                <a16:creationId xmlns:a16="http://schemas.microsoft.com/office/drawing/2014/main" id="{65EE5C3A-D4C3-1B4D-79D4-BA6B8D2C0FC7}"/>
+                <a16:creationId xmlns:a16="http://schemas.microsoft.com/office/drawing/2014/main" id="{5BD5414B-1A41-B3C4-38E7-79D7D9DAC0A6}"/>
               </a:ext>
             </a:extLst>
           </p:cNvPr>
@@ -295,7 +295,7 @@
           <p:cNvPr id="6" name="スライド番号プレースホルダー 5">
             <a:extLst>
               <a:ext uri="{FF2B5EF4-FFF2-40B4-BE49-F238E27FC236}">
-                <a16:creationId xmlns:a16="http://schemas.microsoft.com/office/drawing/2014/main" id="{1F4F342E-35F4-CDAF-A484-CB6C58460911}"/>
+                <a16:creationId xmlns:a16="http://schemas.microsoft.com/office/drawing/2014/main" id="{63A8C257-AA4E-7188-F5DE-95D46862E4FA}"/>
               </a:ext>
             </a:extLst>
           </p:cNvPr>
@@ -311,7 +311,7 @@
           <a:bodyPr/>
           <a:lstStyle/>
           <a:p>
-            <a:fld id="{4C965095-4EB8-4F68-B4CD-F834088C81C9}" type="slidenum">
+            <a:fld id="{6B13FFE0-42E4-41C4-B6AA-0447AC4C2603}" type="slidenum">
               <a:rPr kumimoji="1" lang="ja-JP" altLang="en-US" smtClean="0"/>
               <a:t>‹#›</a:t>
             </a:fld>
@@ -322,7 +322,7 @@
     </p:spTree>
     <p:extLst>
       <p:ext uri="{BB962C8B-B14F-4D97-AF65-F5344CB8AC3E}">
-        <p14:creationId xmlns:p14="http://schemas.microsoft.com/office/powerpoint/2010/main" val="3368282400"/>
+        <p14:creationId xmlns:p14="http://schemas.microsoft.com/office/powerpoint/2010/main" val="147050734"/>
       </p:ext>
     </p:extLst>
   </p:cSld>
@@ -354,7 +354,7 @@
           <p:cNvPr id="2" name="タイトル 1">
             <a:extLst>
               <a:ext uri="{FF2B5EF4-FFF2-40B4-BE49-F238E27FC236}">
-                <a16:creationId xmlns:a16="http://schemas.microsoft.com/office/drawing/2014/main" id="{C69ED558-606B-A766-0025-4406364965E6}"/>
+                <a16:creationId xmlns:a16="http://schemas.microsoft.com/office/drawing/2014/main" id="{0410F013-313F-09AB-97DC-0D6298B8B346}"/>
               </a:ext>
             </a:extLst>
           </p:cNvPr>
@@ -382,7 +382,7 @@
           <p:cNvPr id="3" name="縦書きテキスト プレースホルダー 2">
             <a:extLst>
               <a:ext uri="{FF2B5EF4-FFF2-40B4-BE49-F238E27FC236}">
-                <a16:creationId xmlns:a16="http://schemas.microsoft.com/office/drawing/2014/main" id="{3956B180-077E-85C5-E09C-90DDA06B9CFD}"/>
+                <a16:creationId xmlns:a16="http://schemas.microsoft.com/office/drawing/2014/main" id="{95B251BC-BDC9-3944-845B-076B173FDEE6}"/>
               </a:ext>
             </a:extLst>
           </p:cNvPr>
@@ -471,7 +471,7 @@
           <p:cNvPr id="4" name="日付プレースホルダー 3">
             <a:extLst>
               <a:ext uri="{FF2B5EF4-FFF2-40B4-BE49-F238E27FC236}">
-                <a16:creationId xmlns:a16="http://schemas.microsoft.com/office/drawing/2014/main" id="{45A10F0F-55F6-CD4C-82F3-D9F27F5CAD3D}"/>
+                <a16:creationId xmlns:a16="http://schemas.microsoft.com/office/drawing/2014/main" id="{DB6C96E6-9393-EFF6-66BF-7DFF6E2FAFD5}"/>
               </a:ext>
             </a:extLst>
           </p:cNvPr>
@@ -487,7 +487,7 @@
           <a:bodyPr/>
           <a:lstStyle/>
           <a:p>
-            <a:fld id="{5C512680-44CC-4CE7-BD28-AA82A0A324C6}" type="datetimeFigureOut">
+            <a:fld id="{3B398E8E-E6C4-45B5-B268-4B5D9A817247}" type="datetimeFigureOut">
               <a:rPr kumimoji="1" lang="ja-JP" altLang="en-US" smtClean="0"/>
               <a:t>2026/7/30</a:t>
             </a:fld>
@@ -500,7 +500,7 @@
           <p:cNvPr id="5" name="フッター プレースホルダー 4">
             <a:extLst>
               <a:ext uri="{FF2B5EF4-FFF2-40B4-BE49-F238E27FC236}">
-                <a16:creationId xmlns:a16="http://schemas.microsoft.com/office/drawing/2014/main" id="{84CC3AE0-A7E5-11B6-0F20-EF83F3C2FCDB}"/>
+                <a16:creationId xmlns:a16="http://schemas.microsoft.com/office/drawing/2014/main" id="{5BDEAD56-2511-7AC6-3A6B-5D83E4086D5E}"/>
               </a:ext>
             </a:extLst>
           </p:cNvPr>
@@ -525,7 +525,7 @@
           <p:cNvPr id="6" name="スライド番号プレースホルダー 5">
             <a:extLst>
               <a:ext uri="{FF2B5EF4-FFF2-40B4-BE49-F238E27FC236}">
-                <a16:creationId xmlns:a16="http://schemas.microsoft.com/office/drawing/2014/main" id="{87B3BF74-0C50-19B1-E1BF-C2842EE6BBBC}"/>
+                <a16:creationId xmlns:a16="http://schemas.microsoft.com/office/drawing/2014/main" id="{31C963F3-BE2A-C868-41C7-17FB25291B48}"/>
               </a:ext>
             </a:extLst>
           </p:cNvPr>
@@ -541,7 +541,7 @@
           <a:bodyPr/>
           <a:lstStyle/>
           <a:p>
-            <a:fld id="{4C965095-4EB8-4F68-B4CD-F834088C81C9}" type="slidenum">
+            <a:fld id="{6B13FFE0-42E4-41C4-B6AA-0447AC4C2603}" type="slidenum">
               <a:rPr kumimoji="1" lang="ja-JP" altLang="en-US" smtClean="0"/>
               <a:t>‹#›</a:t>
             </a:fld>
@@ -552,7 +552,7 @@
     </p:spTree>
     <p:extLst>
       <p:ext uri="{BB962C8B-B14F-4D97-AF65-F5344CB8AC3E}">
-        <p14:creationId xmlns:p14="http://schemas.microsoft.com/office/powerpoint/2010/main" val="2272735842"/>
+        <p14:creationId xmlns:p14="http://schemas.microsoft.com/office/powerpoint/2010/main" val="4205507031"/>
       </p:ext>
     </p:extLst>
   </p:cSld>
@@ -584,7 +584,7 @@
           <p:cNvPr id="2" name="縦書きタイトル 1">
             <a:extLst>
               <a:ext uri="{FF2B5EF4-FFF2-40B4-BE49-F238E27FC236}">
-                <a16:creationId xmlns:a16="http://schemas.microsoft.com/office/drawing/2014/main" id="{8373FEE8-ED66-06A0-B928-F874C4C93C15}"/>
+                <a16:creationId xmlns:a16="http://schemas.microsoft.com/office/drawing/2014/main" id="{67548C36-5F89-74BB-B358-E03AE9C382E8}"/>
               </a:ext>
             </a:extLst>
           </p:cNvPr>
@@ -617,7 +617,7 @@
           <p:cNvPr id="3" name="縦書きテキスト プレースホルダー 2">
             <a:extLst>
               <a:ext uri="{FF2B5EF4-FFF2-40B4-BE49-F238E27FC236}">
-                <a16:creationId xmlns:a16="http://schemas.microsoft.com/office/drawing/2014/main" id="{DC42ABA7-7BFD-B8CA-320D-666E808C54E2}"/>
+                <a16:creationId xmlns:a16="http://schemas.microsoft.com/office/drawing/2014/main" id="{385C6568-467A-0A9F-1BEA-48C4933CCD23}"/>
               </a:ext>
             </a:extLst>
           </p:cNvPr>
@@ -711,7 +711,7 @@
           <p:cNvPr id="4" name="日付プレースホルダー 3">
             <a:extLst>
               <a:ext uri="{FF2B5EF4-FFF2-40B4-BE49-F238E27FC236}">
-                <a16:creationId xmlns:a16="http://schemas.microsoft.com/office/drawing/2014/main" id="{5E0C7CD4-AEFA-C513-9992-1B2CAAFF856D}"/>
+                <a16:creationId xmlns:a16="http://schemas.microsoft.com/office/drawing/2014/main" id="{7D122028-8C9F-6A37-4829-1FA50ECE38A1}"/>
               </a:ext>
             </a:extLst>
           </p:cNvPr>
@@ -727,7 +727,7 @@
           <a:bodyPr/>
           <a:lstStyle/>
           <a:p>
-            <a:fld id="{5C512680-44CC-4CE7-BD28-AA82A0A324C6}" type="datetimeFigureOut">
+            <a:fld id="{3B398E8E-E6C4-45B5-B268-4B5D9A817247}" type="datetimeFigureOut">
               <a:rPr kumimoji="1" lang="ja-JP" altLang="en-US" smtClean="0"/>
               <a:t>2026/7/30</a:t>
             </a:fld>
@@ -740,7 +740,7 @@
           <p:cNvPr id="5" name="フッター プレースホルダー 4">
             <a:extLst>
               <a:ext uri="{FF2B5EF4-FFF2-40B4-BE49-F238E27FC236}">
-                <a16:creationId xmlns:a16="http://schemas.microsoft.com/office/drawing/2014/main" id="{14F7E0B4-434F-76E5-5EB5-C09CE8E995DC}"/>
+                <a16:creationId xmlns:a16="http://schemas.microsoft.com/office/drawing/2014/main" id="{DA15DD08-89A1-6990-7952-CAE396B1DB7D}"/>
               </a:ext>
             </a:extLst>
           </p:cNvPr>
@@ -765,7 +765,7 @@
           <p:cNvPr id="6" name="スライド番号プレースホルダー 5">
             <a:extLst>
               <a:ext uri="{FF2B5EF4-FFF2-40B4-BE49-F238E27FC236}">
-                <a16:creationId xmlns:a16="http://schemas.microsoft.com/office/drawing/2014/main" id="{99A3CF70-CF43-8ADD-4777-3F790EFA57D1}"/>
+                <a16:creationId xmlns:a16="http://schemas.microsoft.com/office/drawing/2014/main" id="{BF592F12-A227-63CE-54C8-916AB1A456FC}"/>
               </a:ext>
             </a:extLst>
           </p:cNvPr>
@@ -781,7 +781,7 @@
           <a:bodyPr/>
           <a:lstStyle/>
           <a:p>
-            <a:fld id="{4C965095-4EB8-4F68-B4CD-F834088C81C9}" type="slidenum">
+            <a:fld id="{6B13FFE0-42E4-41C4-B6AA-0447AC4C2603}" type="slidenum">
               <a:rPr kumimoji="1" lang="ja-JP" altLang="en-US" smtClean="0"/>
               <a:t>‹#›</a:t>
             </a:fld>
@@ -792,7 +792,7 @@
     </p:spTree>
     <p:extLst>
       <p:ext uri="{BB962C8B-B14F-4D97-AF65-F5344CB8AC3E}">
-        <p14:creationId xmlns:p14="http://schemas.microsoft.com/office/powerpoint/2010/main" val="1017966808"/>
+        <p14:creationId xmlns:p14="http://schemas.microsoft.com/office/powerpoint/2010/main" val="1109889167"/>
       </p:ext>
     </p:extLst>
   </p:cSld>
@@ -824,7 +824,7 @@
           <p:cNvPr id="2" name="タイトル 1">
             <a:extLst>
               <a:ext uri="{FF2B5EF4-FFF2-40B4-BE49-F238E27FC236}">
-                <a16:creationId xmlns:a16="http://schemas.microsoft.com/office/drawing/2014/main" id="{D76543C6-4138-882B-73F1-2DCDF0B8ED6C}"/>
+                <a16:creationId xmlns:a16="http://schemas.microsoft.com/office/drawing/2014/main" id="{A8FD83AD-8517-EEB7-9EAB-89ED764DBAB6}"/>
               </a:ext>
             </a:extLst>
           </p:cNvPr>
@@ -852,7 +852,7 @@
           <p:cNvPr id="3" name="コンテンツ プレースホルダー 2">
             <a:extLst>
               <a:ext uri="{FF2B5EF4-FFF2-40B4-BE49-F238E27FC236}">
-                <a16:creationId xmlns:a16="http://schemas.microsoft.com/office/drawing/2014/main" id="{720C32A9-0C87-6439-74A3-226AC8BE7A5E}"/>
+                <a16:creationId xmlns:a16="http://schemas.microsoft.com/office/drawing/2014/main" id="{14FB61A7-7F16-33ED-D814-1998E8F986C6}"/>
               </a:ext>
             </a:extLst>
           </p:cNvPr>
@@ -941,7 +941,7 @@
           <p:cNvPr id="4" name="日付プレースホルダー 3">
             <a:extLst>
               <a:ext uri="{FF2B5EF4-FFF2-40B4-BE49-F238E27FC236}">
-                <a16:creationId xmlns:a16="http://schemas.microsoft.com/office/drawing/2014/main" id="{B86653F8-20DB-252C-8A28-A9FAC3BA0A30}"/>
+                <a16:creationId xmlns:a16="http://schemas.microsoft.com/office/drawing/2014/main" id="{D5AAC4AC-5DFF-D8DF-F421-7725DA72673C}"/>
               </a:ext>
             </a:extLst>
           </p:cNvPr>
@@ -957,7 +957,7 @@
           <a:bodyPr/>
           <a:lstStyle/>
           <a:p>
-            <a:fld id="{5C512680-44CC-4CE7-BD28-AA82A0A324C6}" type="datetimeFigureOut">
+            <a:fld id="{3B398E8E-E6C4-45B5-B268-4B5D9A817247}" type="datetimeFigureOut">
               <a:rPr kumimoji="1" lang="ja-JP" altLang="en-US" smtClean="0"/>
               <a:t>2026/7/30</a:t>
             </a:fld>
@@ -970,7 +970,7 @@
           <p:cNvPr id="5" name="フッター プレースホルダー 4">
             <a:extLst>
               <a:ext uri="{FF2B5EF4-FFF2-40B4-BE49-F238E27FC236}">
-                <a16:creationId xmlns:a16="http://schemas.microsoft.com/office/drawing/2014/main" id="{E1CE02D4-0DA1-017F-4EE7-55238D16D247}"/>
+                <a16:creationId xmlns:a16="http://schemas.microsoft.com/office/drawing/2014/main" id="{C9D0F9EF-FCE0-C6A4-A5BC-831459D6F325}"/>
               </a:ext>
             </a:extLst>
           </p:cNvPr>
@@ -995,7 +995,7 @@
           <p:cNvPr id="6" name="スライド番号プレースホルダー 5">
             <a:extLst>
               <a:ext uri="{FF2B5EF4-FFF2-40B4-BE49-F238E27FC236}">
-                <a16:creationId xmlns:a16="http://schemas.microsoft.com/office/drawing/2014/main" id="{6A716C2C-7768-2703-E093-98865F78D2A5}"/>
+                <a16:creationId xmlns:a16="http://schemas.microsoft.com/office/drawing/2014/main" id="{DA6B0243-EFB0-868D-9499-A9BE595A7FB6}"/>
               </a:ext>
             </a:extLst>
           </p:cNvPr>
@@ -1011,7 +1011,7 @@
           <a:bodyPr/>
           <a:lstStyle/>
           <a:p>
-            <a:fld id="{4C965095-4EB8-4F68-B4CD-F834088C81C9}" type="slidenum">
+            <a:fld id="{6B13FFE0-42E4-41C4-B6AA-0447AC4C2603}" type="slidenum">
               <a:rPr kumimoji="1" lang="ja-JP" altLang="en-US" smtClean="0"/>
               <a:t>‹#›</a:t>
             </a:fld>
@@ -1022,7 +1022,7 @@
     </p:spTree>
     <p:extLst>
       <p:ext uri="{BB962C8B-B14F-4D97-AF65-F5344CB8AC3E}">
-        <p14:creationId xmlns:p14="http://schemas.microsoft.com/office/powerpoint/2010/main" val="1726132227"/>
+        <p14:creationId xmlns:p14="http://schemas.microsoft.com/office/powerpoint/2010/main" val="2055852446"/>
       </p:ext>
     </p:extLst>
   </p:cSld>
@@ -1054,7 +1054,7 @@
           <p:cNvPr id="2" name="タイトル 1">
             <a:extLst>
               <a:ext uri="{FF2B5EF4-FFF2-40B4-BE49-F238E27FC236}">
-                <a16:creationId xmlns:a16="http://schemas.microsoft.com/office/drawing/2014/main" id="{D50BEF4B-E02F-55CB-3BF5-3EFC004CBA80}"/>
+                <a16:creationId xmlns:a16="http://schemas.microsoft.com/office/drawing/2014/main" id="{26112352-7D9D-59D9-8B60-F37671025DE2}"/>
               </a:ext>
             </a:extLst>
           </p:cNvPr>
@@ -1091,7 +1091,7 @@
           <p:cNvPr id="3" name="テキスト プレースホルダー 2">
             <a:extLst>
               <a:ext uri="{FF2B5EF4-FFF2-40B4-BE49-F238E27FC236}">
-                <a16:creationId xmlns:a16="http://schemas.microsoft.com/office/drawing/2014/main" id="{628B84F9-D6FE-B9C3-A513-8578A1F52B93}"/>
+                <a16:creationId xmlns:a16="http://schemas.microsoft.com/office/drawing/2014/main" id="{88CC26D4-62D4-564B-2E9C-13268E798409}"/>
               </a:ext>
             </a:extLst>
           </p:cNvPr>
@@ -1216,7 +1216,7 @@
           <p:cNvPr id="4" name="日付プレースホルダー 3">
             <a:extLst>
               <a:ext uri="{FF2B5EF4-FFF2-40B4-BE49-F238E27FC236}">
-                <a16:creationId xmlns:a16="http://schemas.microsoft.com/office/drawing/2014/main" id="{97EDA195-C3F2-A7C8-1B4E-5F93E81C0648}"/>
+                <a16:creationId xmlns:a16="http://schemas.microsoft.com/office/drawing/2014/main" id="{5BD2901B-CDFC-0731-0D88-5BD84E5C1DAC}"/>
               </a:ext>
             </a:extLst>
           </p:cNvPr>
@@ -1232,7 +1232,7 @@
           <a:bodyPr/>
           <a:lstStyle/>
           <a:p>
-            <a:fld id="{5C512680-44CC-4CE7-BD28-AA82A0A324C6}" type="datetimeFigureOut">
+            <a:fld id="{3B398E8E-E6C4-45B5-B268-4B5D9A817247}" type="datetimeFigureOut">
               <a:rPr kumimoji="1" lang="ja-JP" altLang="en-US" smtClean="0"/>
               <a:t>2026/7/30</a:t>
             </a:fld>
@@ -1245,7 +1245,7 @@
           <p:cNvPr id="5" name="フッター プレースホルダー 4">
             <a:extLst>
               <a:ext uri="{FF2B5EF4-FFF2-40B4-BE49-F238E27FC236}">
-                <a16:creationId xmlns:a16="http://schemas.microsoft.com/office/drawing/2014/main" id="{66BF8AE3-BBDA-B1C6-1623-0C495E2C90DF}"/>
+                <a16:creationId xmlns:a16="http://schemas.microsoft.com/office/drawing/2014/main" id="{D539A3BC-F562-C3E1-8AB0-40AE09DBAD9B}"/>
               </a:ext>
             </a:extLst>
           </p:cNvPr>
@@ -1270,7 +1270,7 @@
           <p:cNvPr id="6" name="スライド番号プレースホルダー 5">
             <a:extLst>
               <a:ext uri="{FF2B5EF4-FFF2-40B4-BE49-F238E27FC236}">
-                <a16:creationId xmlns:a16="http://schemas.microsoft.com/office/drawing/2014/main" id="{178181A3-64E8-E340-F706-6F3AF605001F}"/>
+                <a16:creationId xmlns:a16="http://schemas.microsoft.com/office/drawing/2014/main" id="{1F960823-1041-43BF-A5FB-B72260738724}"/>
               </a:ext>
             </a:extLst>
           </p:cNvPr>
@@ -1286,7 +1286,7 @@
           <a:bodyPr/>
           <a:lstStyle/>
           <a:p>
-            <a:fld id="{4C965095-4EB8-4F68-B4CD-F834088C81C9}" type="slidenum">
+            <a:fld id="{6B13FFE0-42E4-41C4-B6AA-0447AC4C2603}" type="slidenum">
               <a:rPr kumimoji="1" lang="ja-JP" altLang="en-US" smtClean="0"/>
               <a:t>‹#›</a:t>
             </a:fld>
@@ -1297,7 +1297,7 @@
     </p:spTree>
     <p:extLst>
       <p:ext uri="{BB962C8B-B14F-4D97-AF65-F5344CB8AC3E}">
-        <p14:creationId xmlns:p14="http://schemas.microsoft.com/office/powerpoint/2010/main" val="2612303087"/>
+        <p14:creationId xmlns:p14="http://schemas.microsoft.com/office/powerpoint/2010/main" val="3883800406"/>
       </p:ext>
     </p:extLst>
   </p:cSld>
@@ -1329,7 +1329,7 @@
           <p:cNvPr id="2" name="タイトル 1">
             <a:extLst>
               <a:ext uri="{FF2B5EF4-FFF2-40B4-BE49-F238E27FC236}">
-                <a16:creationId xmlns:a16="http://schemas.microsoft.com/office/drawing/2014/main" id="{3B01DE6D-097E-282E-60D8-978271E2FAF0}"/>
+                <a16:creationId xmlns:a16="http://schemas.microsoft.com/office/drawing/2014/main" id="{303E3E5A-4075-BB4B-2010-7F31E8977A55}"/>
               </a:ext>
             </a:extLst>
           </p:cNvPr>
@@ -1357,7 +1357,7 @@
           <p:cNvPr id="3" name="コンテンツ プレースホルダー 2">
             <a:extLst>
               <a:ext uri="{FF2B5EF4-FFF2-40B4-BE49-F238E27FC236}">
-                <a16:creationId xmlns:a16="http://schemas.microsoft.com/office/drawing/2014/main" id="{ADEB7B1B-A296-5F46-B8AC-7D4258930FDE}"/>
+                <a16:creationId xmlns:a16="http://schemas.microsoft.com/office/drawing/2014/main" id="{6BDFB532-0349-ED30-AC3D-E4D2FB676F22}"/>
               </a:ext>
             </a:extLst>
           </p:cNvPr>
@@ -1451,7 +1451,7 @@
           <p:cNvPr id="4" name="コンテンツ プレースホルダー 3">
             <a:extLst>
               <a:ext uri="{FF2B5EF4-FFF2-40B4-BE49-F238E27FC236}">
-                <a16:creationId xmlns:a16="http://schemas.microsoft.com/office/drawing/2014/main" id="{8B0F6B52-76DE-7878-D1DD-38EF3519E0DC}"/>
+                <a16:creationId xmlns:a16="http://schemas.microsoft.com/office/drawing/2014/main" id="{441D9EC7-E1F8-E1A5-F0B7-95BE602A9AFD}"/>
               </a:ext>
             </a:extLst>
           </p:cNvPr>
@@ -1545,7 +1545,7 @@
           <p:cNvPr id="5" name="日付プレースホルダー 4">
             <a:extLst>
               <a:ext uri="{FF2B5EF4-FFF2-40B4-BE49-F238E27FC236}">
-                <a16:creationId xmlns:a16="http://schemas.microsoft.com/office/drawing/2014/main" id="{D1E049D8-9E97-94BB-D369-82893038EB39}"/>
+                <a16:creationId xmlns:a16="http://schemas.microsoft.com/office/drawing/2014/main" id="{DBB6BD6A-2156-103D-4D6C-294986D52784}"/>
               </a:ext>
             </a:extLst>
           </p:cNvPr>
@@ -1561,7 +1561,7 @@
           <a:bodyPr/>
           <a:lstStyle/>
           <a:p>
-            <a:fld id="{5C512680-44CC-4CE7-BD28-AA82A0A324C6}" type="datetimeFigureOut">
+            <a:fld id="{3B398E8E-E6C4-45B5-B268-4B5D9A817247}" type="datetimeFigureOut">
               <a:rPr kumimoji="1" lang="ja-JP" altLang="en-US" smtClean="0"/>
               <a:t>2026/7/30</a:t>
             </a:fld>
@@ -1574,7 +1574,7 @@
           <p:cNvPr id="6" name="フッター プレースホルダー 5">
             <a:extLst>
               <a:ext uri="{FF2B5EF4-FFF2-40B4-BE49-F238E27FC236}">
-                <a16:creationId xmlns:a16="http://schemas.microsoft.com/office/drawing/2014/main" id="{0B461CB2-8787-C49D-F833-B48D8DB175B3}"/>
+                <a16:creationId xmlns:a16="http://schemas.microsoft.com/office/drawing/2014/main" id="{7EA3969E-A7E3-1154-C013-A71FEB348BF3}"/>
               </a:ext>
             </a:extLst>
           </p:cNvPr>
@@ -1599,7 +1599,7 @@
           <p:cNvPr id="7" name="スライド番号プレースホルダー 6">
             <a:extLst>
               <a:ext uri="{FF2B5EF4-FFF2-40B4-BE49-F238E27FC236}">
-                <a16:creationId xmlns:a16="http://schemas.microsoft.com/office/drawing/2014/main" id="{500A1CDA-EF40-2986-C2E1-8601C81C2304}"/>
+                <a16:creationId xmlns:a16="http://schemas.microsoft.com/office/drawing/2014/main" id="{40D3419B-CE49-6921-C82C-555890B35BCB}"/>
               </a:ext>
             </a:extLst>
           </p:cNvPr>
@@ -1615,7 +1615,7 @@
           <a:bodyPr/>
           <a:lstStyle/>
           <a:p>
-            <a:fld id="{4C965095-4EB8-4F68-B4CD-F834088C81C9}" type="slidenum">
+            <a:fld id="{6B13FFE0-42E4-41C4-B6AA-0447AC4C2603}" type="slidenum">
               <a:rPr kumimoji="1" lang="ja-JP" altLang="en-US" smtClean="0"/>
               <a:t>‹#›</a:t>
             </a:fld>
@@ -1626,7 +1626,7 @@
     </p:spTree>
     <p:extLst>
       <p:ext uri="{BB962C8B-B14F-4D97-AF65-F5344CB8AC3E}">
-        <p14:creationId xmlns:p14="http://schemas.microsoft.com/office/powerpoint/2010/main" val="626704661"/>
+        <p14:creationId xmlns:p14="http://schemas.microsoft.com/office/powerpoint/2010/main" val="3556387400"/>
       </p:ext>
     </p:extLst>
   </p:cSld>
@@ -1658,7 +1658,7 @@
           <p:cNvPr id="2" name="タイトル 1">
             <a:extLst>
               <a:ext uri="{FF2B5EF4-FFF2-40B4-BE49-F238E27FC236}">
-                <a16:creationId xmlns:a16="http://schemas.microsoft.com/office/drawing/2014/main" id="{D64CD004-9C72-3977-A959-B6C07227CBD8}"/>
+                <a16:creationId xmlns:a16="http://schemas.microsoft.com/office/drawing/2014/main" id="{00159D1E-AC09-644A-5BAF-DBC958797029}"/>
               </a:ext>
             </a:extLst>
           </p:cNvPr>
@@ -1691,7 +1691,7 @@
           <p:cNvPr id="3" name="テキスト プレースホルダー 2">
             <a:extLst>
               <a:ext uri="{FF2B5EF4-FFF2-40B4-BE49-F238E27FC236}">
-                <a16:creationId xmlns:a16="http://schemas.microsoft.com/office/drawing/2014/main" id="{81EE040F-946E-4C55-99DD-9AA8AB1B46B4}"/>
+                <a16:creationId xmlns:a16="http://schemas.microsoft.com/office/drawing/2014/main" id="{4172B0D1-4ED3-8F73-EB9E-FBB6D0AE5CE8}"/>
               </a:ext>
             </a:extLst>
           </p:cNvPr>
@@ -1762,7 +1762,7 @@
           <p:cNvPr id="4" name="コンテンツ プレースホルダー 3">
             <a:extLst>
               <a:ext uri="{FF2B5EF4-FFF2-40B4-BE49-F238E27FC236}">
-                <a16:creationId xmlns:a16="http://schemas.microsoft.com/office/drawing/2014/main" id="{4FFE6D84-FC6F-4F7F-74D3-E8BF64BC7AE5}"/>
+                <a16:creationId xmlns:a16="http://schemas.microsoft.com/office/drawing/2014/main" id="{69997570-B299-1FAB-B44E-E2F650C45E22}"/>
               </a:ext>
             </a:extLst>
           </p:cNvPr>
@@ -1856,7 +1856,7 @@
           <p:cNvPr id="5" name="テキスト プレースホルダー 4">
             <a:extLst>
               <a:ext uri="{FF2B5EF4-FFF2-40B4-BE49-F238E27FC236}">
-                <a16:creationId xmlns:a16="http://schemas.microsoft.com/office/drawing/2014/main" id="{9D63AB93-DFA1-CC66-C0A8-32047AE9950A}"/>
+                <a16:creationId xmlns:a16="http://schemas.microsoft.com/office/drawing/2014/main" id="{D135FFD2-4BF5-C7C6-F8C3-4FF2AD4A4007}"/>
               </a:ext>
             </a:extLst>
           </p:cNvPr>
@@ -1927,7 +1927,7 @@
           <p:cNvPr id="6" name="コンテンツ プレースホルダー 5">
             <a:extLst>
               <a:ext uri="{FF2B5EF4-FFF2-40B4-BE49-F238E27FC236}">
-                <a16:creationId xmlns:a16="http://schemas.microsoft.com/office/drawing/2014/main" id="{BE067E3F-2964-3ACF-5EE7-4FE9CE359F35}"/>
+                <a16:creationId xmlns:a16="http://schemas.microsoft.com/office/drawing/2014/main" id="{027FC2A2-0884-7263-BA89-539A564E8FEE}"/>
               </a:ext>
             </a:extLst>
           </p:cNvPr>
@@ -2021,7 +2021,7 @@
           <p:cNvPr id="7" name="日付プレースホルダー 6">
             <a:extLst>
               <a:ext uri="{FF2B5EF4-FFF2-40B4-BE49-F238E27FC236}">
-                <a16:creationId xmlns:a16="http://schemas.microsoft.com/office/drawing/2014/main" id="{F5D7F003-0F35-A0C1-7457-1FDF99C359BB}"/>
+                <a16:creationId xmlns:a16="http://schemas.microsoft.com/office/drawing/2014/main" id="{54FA2DB7-7480-F787-926B-B8AD8280AC53}"/>
               </a:ext>
             </a:extLst>
           </p:cNvPr>
@@ -2037,7 +2037,7 @@
           <a:bodyPr/>
           <a:lstStyle/>
           <a:p>
-            <a:fld id="{5C512680-44CC-4CE7-BD28-AA82A0A324C6}" type="datetimeFigureOut">
+            <a:fld id="{3B398E8E-E6C4-45B5-B268-4B5D9A817247}" type="datetimeFigureOut">
               <a:rPr kumimoji="1" lang="ja-JP" altLang="en-US" smtClean="0"/>
               <a:t>2026/7/30</a:t>
             </a:fld>
@@ -2050,7 +2050,7 @@
           <p:cNvPr id="8" name="フッター プレースホルダー 7">
             <a:extLst>
               <a:ext uri="{FF2B5EF4-FFF2-40B4-BE49-F238E27FC236}">
-                <a16:creationId xmlns:a16="http://schemas.microsoft.com/office/drawing/2014/main" id="{7A294C45-20EB-3B01-B007-DDAB383503E0}"/>
+                <a16:creationId xmlns:a16="http://schemas.microsoft.com/office/drawing/2014/main" id="{CE3050ED-7568-B1CC-1EE4-E984354856F8}"/>
               </a:ext>
             </a:extLst>
           </p:cNvPr>
@@ -2075,7 +2075,7 @@
           <p:cNvPr id="9" name="スライド番号プレースホルダー 8">
             <a:extLst>
               <a:ext uri="{FF2B5EF4-FFF2-40B4-BE49-F238E27FC236}">
-                <a16:creationId xmlns:a16="http://schemas.microsoft.com/office/drawing/2014/main" id="{A018244D-F76D-B0D9-80FF-81A3995FE2C8}"/>
+                <a16:creationId xmlns:a16="http://schemas.microsoft.com/office/drawing/2014/main" id="{470D0AFE-5609-88DB-F4F1-AD8BD8B81530}"/>
               </a:ext>
             </a:extLst>
           </p:cNvPr>
@@ -2091,7 +2091,7 @@
           <a:bodyPr/>
           <a:lstStyle/>
           <a:p>
-            <a:fld id="{4C965095-4EB8-4F68-B4CD-F834088C81C9}" type="slidenum">
+            <a:fld id="{6B13FFE0-42E4-41C4-B6AA-0447AC4C2603}" type="slidenum">
               <a:rPr kumimoji="1" lang="ja-JP" altLang="en-US" smtClean="0"/>
               <a:t>‹#›</a:t>
             </a:fld>
@@ -2102,7 +2102,7 @@
     </p:spTree>
     <p:extLst>
       <p:ext uri="{BB962C8B-B14F-4D97-AF65-F5344CB8AC3E}">
-        <p14:creationId xmlns:p14="http://schemas.microsoft.com/office/powerpoint/2010/main" val="2765932966"/>
+        <p14:creationId xmlns:p14="http://schemas.microsoft.com/office/powerpoint/2010/main" val="3261203264"/>
       </p:ext>
     </p:extLst>
   </p:cSld>
@@ -2134,7 +2134,7 @@
           <p:cNvPr id="2" name="タイトル 1">
             <a:extLst>
               <a:ext uri="{FF2B5EF4-FFF2-40B4-BE49-F238E27FC236}">
-                <a16:creationId xmlns:a16="http://schemas.microsoft.com/office/drawing/2014/main" id="{AF29E979-E0FC-F963-FFD2-9A6F3FC90BD2}"/>
+                <a16:creationId xmlns:a16="http://schemas.microsoft.com/office/drawing/2014/main" id="{61D15337-ED22-4CEA-258D-5EA706098A22}"/>
               </a:ext>
             </a:extLst>
           </p:cNvPr>
@@ -2162,7 +2162,7 @@
           <p:cNvPr id="3" name="日付プレースホルダー 2">
             <a:extLst>
               <a:ext uri="{FF2B5EF4-FFF2-40B4-BE49-F238E27FC236}">
-                <a16:creationId xmlns:a16="http://schemas.microsoft.com/office/drawing/2014/main" id="{9C6005E1-B9D0-2861-CCB0-69B633B451B8}"/>
+                <a16:creationId xmlns:a16="http://schemas.microsoft.com/office/drawing/2014/main" id="{348F60F9-853F-B81D-26B3-BE9E4099489C}"/>
               </a:ext>
             </a:extLst>
           </p:cNvPr>
@@ -2178,7 +2178,7 @@
           <a:bodyPr/>
           <a:lstStyle/>
           <a:p>
-            <a:fld id="{5C512680-44CC-4CE7-BD28-AA82A0A324C6}" type="datetimeFigureOut">
+            <a:fld id="{3B398E8E-E6C4-45B5-B268-4B5D9A817247}" type="datetimeFigureOut">
               <a:rPr kumimoji="1" lang="ja-JP" altLang="en-US" smtClean="0"/>
               <a:t>2026/7/30</a:t>
             </a:fld>
@@ -2191,7 +2191,7 @@
           <p:cNvPr id="4" name="フッター プレースホルダー 3">
             <a:extLst>
               <a:ext uri="{FF2B5EF4-FFF2-40B4-BE49-F238E27FC236}">
-                <a16:creationId xmlns:a16="http://schemas.microsoft.com/office/drawing/2014/main" id="{8B56977A-4E3F-20B6-901A-7160FB60D1A1}"/>
+                <a16:creationId xmlns:a16="http://schemas.microsoft.com/office/drawing/2014/main" id="{3E40A11B-E48F-16FB-5182-CC55ED838DD2}"/>
               </a:ext>
             </a:extLst>
           </p:cNvPr>
@@ -2216,7 +2216,7 @@
           <p:cNvPr id="5" name="スライド番号プレースホルダー 4">
             <a:extLst>
               <a:ext uri="{FF2B5EF4-FFF2-40B4-BE49-F238E27FC236}">
-                <a16:creationId xmlns:a16="http://schemas.microsoft.com/office/drawing/2014/main" id="{B3775DCF-AA65-9315-E553-7C36CC1CEEF0}"/>
+                <a16:creationId xmlns:a16="http://schemas.microsoft.com/office/drawing/2014/main" id="{448C3B8C-E79A-4470-36F5-67808C7E4DB1}"/>
               </a:ext>
             </a:extLst>
           </p:cNvPr>
@@ -2232,7 +2232,7 @@
           <a:bodyPr/>
           <a:lstStyle/>
           <a:p>
-            <a:fld id="{4C965095-4EB8-4F68-B4CD-F834088C81C9}" type="slidenum">
+            <a:fld id="{6B13FFE0-42E4-41C4-B6AA-0447AC4C2603}" type="slidenum">
               <a:rPr kumimoji="1" lang="ja-JP" altLang="en-US" smtClean="0"/>
               <a:t>‹#›</a:t>
             </a:fld>
@@ -2243,7 +2243,7 @@
     </p:spTree>
     <p:extLst>
       <p:ext uri="{BB962C8B-B14F-4D97-AF65-F5344CB8AC3E}">
-        <p14:creationId xmlns:p14="http://schemas.microsoft.com/office/powerpoint/2010/main" val="95407709"/>
+        <p14:creationId xmlns:p14="http://schemas.microsoft.com/office/powerpoint/2010/main" val="929346081"/>
       </p:ext>
     </p:extLst>
   </p:cSld>
@@ -2275,7 +2275,7 @@
           <p:cNvPr id="2" name="日付プレースホルダー 1">
             <a:extLst>
               <a:ext uri="{FF2B5EF4-FFF2-40B4-BE49-F238E27FC236}">
-                <a16:creationId xmlns:a16="http://schemas.microsoft.com/office/drawing/2014/main" id="{4B5E1B35-2BCE-9FE9-0F29-9F53ECD3882C}"/>
+                <a16:creationId xmlns:a16="http://schemas.microsoft.com/office/drawing/2014/main" id="{97642134-3BDC-ED53-80DC-D9D36C0B230F}"/>
               </a:ext>
             </a:extLst>
           </p:cNvPr>
@@ -2291,7 +2291,7 @@
           <a:bodyPr/>
           <a:lstStyle/>
           <a:p>
-            <a:fld id="{5C512680-44CC-4CE7-BD28-AA82A0A324C6}" type="datetimeFigureOut">
+            <a:fld id="{3B398E8E-E6C4-45B5-B268-4B5D9A817247}" type="datetimeFigureOut">
               <a:rPr kumimoji="1" lang="ja-JP" altLang="en-US" smtClean="0"/>
               <a:t>2026/7/30</a:t>
             </a:fld>
@@ -2304,7 +2304,7 @@
           <p:cNvPr id="3" name="フッター プレースホルダー 2">
             <a:extLst>
               <a:ext uri="{FF2B5EF4-FFF2-40B4-BE49-F238E27FC236}">
-                <a16:creationId xmlns:a16="http://schemas.microsoft.com/office/drawing/2014/main" id="{E3CCCB88-9A79-16F3-7F66-5EAC6214E672}"/>
+                <a16:creationId xmlns:a16="http://schemas.microsoft.com/office/drawing/2014/main" id="{F72974AE-E3D8-63CB-3AFC-B38ACC68DE10}"/>
               </a:ext>
             </a:extLst>
           </p:cNvPr>
@@ -2329,7 +2329,7 @@
           <p:cNvPr id="4" name="スライド番号プレースホルダー 3">
             <a:extLst>
               <a:ext uri="{FF2B5EF4-FFF2-40B4-BE49-F238E27FC236}">
-                <a16:creationId xmlns:a16="http://schemas.microsoft.com/office/drawing/2014/main" id="{3C77D565-D55C-E9CA-5075-BA007C608C70}"/>
+                <a16:creationId xmlns:a16="http://schemas.microsoft.com/office/drawing/2014/main" id="{53F55AA6-02D3-E2BA-1C3F-9568F8A3043E}"/>
               </a:ext>
             </a:extLst>
           </p:cNvPr>
@@ -2345,7 +2345,7 @@
           <a:bodyPr/>
           <a:lstStyle/>
           <a:p>
-            <a:fld id="{4C965095-4EB8-4F68-B4CD-F834088C81C9}" type="slidenum">
+            <a:fld id="{6B13FFE0-42E4-41C4-B6AA-0447AC4C2603}" type="slidenum">
               <a:rPr kumimoji="1" lang="ja-JP" altLang="en-US" smtClean="0"/>
               <a:t>‹#›</a:t>
             </a:fld>
@@ -2356,7 +2356,7 @@
     </p:spTree>
     <p:extLst>
       <p:ext uri="{BB962C8B-B14F-4D97-AF65-F5344CB8AC3E}">
-        <p14:creationId xmlns:p14="http://schemas.microsoft.com/office/powerpoint/2010/main" val="4253349918"/>
+        <p14:creationId xmlns:p14="http://schemas.microsoft.com/office/powerpoint/2010/main" val="245725281"/>
       </p:ext>
     </p:extLst>
   </p:cSld>
@@ -2388,7 +2388,7 @@
           <p:cNvPr id="2" name="タイトル 1">
             <a:extLst>
               <a:ext uri="{FF2B5EF4-FFF2-40B4-BE49-F238E27FC236}">
-                <a16:creationId xmlns:a16="http://schemas.microsoft.com/office/drawing/2014/main" id="{35F787EE-38B2-9C74-F88B-17037A29A9D4}"/>
+                <a16:creationId xmlns:a16="http://schemas.microsoft.com/office/drawing/2014/main" id="{65340D9F-CF29-03E1-22C1-FE00175BD260}"/>
               </a:ext>
             </a:extLst>
           </p:cNvPr>
@@ -2425,7 +2425,7 @@
           <p:cNvPr id="3" name="コンテンツ プレースホルダー 2">
             <a:extLst>
               <a:ext uri="{FF2B5EF4-FFF2-40B4-BE49-F238E27FC236}">
-                <a16:creationId xmlns:a16="http://schemas.microsoft.com/office/drawing/2014/main" id="{F4B59C0C-7901-6402-1926-4594FD092658}"/>
+                <a16:creationId xmlns:a16="http://schemas.microsoft.com/office/drawing/2014/main" id="{B06E1FBC-3F32-0F67-410A-26188EDB3A47}"/>
               </a:ext>
             </a:extLst>
           </p:cNvPr>
@@ -2547,7 +2547,7 @@
           <p:cNvPr id="4" name="テキスト プレースホルダー 3">
             <a:extLst>
               <a:ext uri="{FF2B5EF4-FFF2-40B4-BE49-F238E27FC236}">
-                <a16:creationId xmlns:a16="http://schemas.microsoft.com/office/drawing/2014/main" id="{864B3DC8-7C47-E68E-105B-6963248AC7CE}"/>
+                <a16:creationId xmlns:a16="http://schemas.microsoft.com/office/drawing/2014/main" id="{E86E25B8-92B7-62FD-0861-5D0BC45014F7}"/>
               </a:ext>
             </a:extLst>
           </p:cNvPr>
@@ -2618,7 +2618,7 @@
           <p:cNvPr id="5" name="日付プレースホルダー 4">
             <a:extLst>
               <a:ext uri="{FF2B5EF4-FFF2-40B4-BE49-F238E27FC236}">
-                <a16:creationId xmlns:a16="http://schemas.microsoft.com/office/drawing/2014/main" id="{CEBB1EF8-9F4A-3376-1795-9B24E4C90FDC}"/>
+                <a16:creationId xmlns:a16="http://schemas.microsoft.com/office/drawing/2014/main" id="{9C519DEB-9A85-E5DD-4E8E-0FACD0287B5C}"/>
               </a:ext>
             </a:extLst>
           </p:cNvPr>
@@ -2634,7 +2634,7 @@
           <a:bodyPr/>
           <a:lstStyle/>
           <a:p>
-            <a:fld id="{5C512680-44CC-4CE7-BD28-AA82A0A324C6}" type="datetimeFigureOut">
+            <a:fld id="{3B398E8E-E6C4-45B5-B268-4B5D9A817247}" type="datetimeFigureOut">
               <a:rPr kumimoji="1" lang="ja-JP" altLang="en-US" smtClean="0"/>
               <a:t>2026/7/30</a:t>
             </a:fld>
@@ -2647,7 +2647,7 @@
           <p:cNvPr id="6" name="フッター プレースホルダー 5">
             <a:extLst>
               <a:ext uri="{FF2B5EF4-FFF2-40B4-BE49-F238E27FC236}">
-                <a16:creationId xmlns:a16="http://schemas.microsoft.com/office/drawing/2014/main" id="{7E570FE7-7600-2900-F90D-E09384ECF3E1}"/>
+                <a16:creationId xmlns:a16="http://schemas.microsoft.com/office/drawing/2014/main" id="{629759B1-32F2-B488-979A-079C2FBB83B9}"/>
               </a:ext>
             </a:extLst>
           </p:cNvPr>
@@ -2672,7 +2672,7 @@
           <p:cNvPr id="7" name="スライド番号プレースホルダー 6">
             <a:extLst>
               <a:ext uri="{FF2B5EF4-FFF2-40B4-BE49-F238E27FC236}">
-                <a16:creationId xmlns:a16="http://schemas.microsoft.com/office/drawing/2014/main" id="{DD3FD650-262E-557F-01AA-6B83562BBD71}"/>
+                <a16:creationId xmlns:a16="http://schemas.microsoft.com/office/drawing/2014/main" id="{DFAF6637-DA6A-B13D-8E98-F1F01B8C8ECB}"/>
               </a:ext>
             </a:extLst>
           </p:cNvPr>
@@ -2688,7 +2688,7 @@
           <a:bodyPr/>
           <a:lstStyle/>
           <a:p>
-            <a:fld id="{4C965095-4EB8-4F68-B4CD-F834088C81C9}" type="slidenum">
+            <a:fld id="{6B13FFE0-42E4-41C4-B6AA-0447AC4C2603}" type="slidenum">
               <a:rPr kumimoji="1" lang="ja-JP" altLang="en-US" smtClean="0"/>
               <a:t>‹#›</a:t>
             </a:fld>
@@ -2699,7 +2699,7 @@
     </p:spTree>
     <p:extLst>
       <p:ext uri="{BB962C8B-B14F-4D97-AF65-F5344CB8AC3E}">
-        <p14:creationId xmlns:p14="http://schemas.microsoft.com/office/powerpoint/2010/main" val="2457981843"/>
+        <p14:creationId xmlns:p14="http://schemas.microsoft.com/office/powerpoint/2010/main" val="423719536"/>
       </p:ext>
     </p:extLst>
   </p:cSld>
@@ -2731,7 +2731,7 @@
           <p:cNvPr id="2" name="タイトル 1">
             <a:extLst>
               <a:ext uri="{FF2B5EF4-FFF2-40B4-BE49-F238E27FC236}">
-                <a16:creationId xmlns:a16="http://schemas.microsoft.com/office/drawing/2014/main" id="{C068BA0A-6C05-5205-BD7C-3FF12377035E}"/>
+                <a16:creationId xmlns:a16="http://schemas.microsoft.com/office/drawing/2014/main" id="{36A93EAD-7BA6-1087-098C-000C67C26DC1}"/>
               </a:ext>
             </a:extLst>
           </p:cNvPr>
@@ -2768,7 +2768,7 @@
           <p:cNvPr id="3" name="図プレースホルダー 2">
             <a:extLst>
               <a:ext uri="{FF2B5EF4-FFF2-40B4-BE49-F238E27FC236}">
-                <a16:creationId xmlns:a16="http://schemas.microsoft.com/office/drawing/2014/main" id="{C8F99EF8-EE0F-F26B-6E61-32DF557E12AB}"/>
+                <a16:creationId xmlns:a16="http://schemas.microsoft.com/office/drawing/2014/main" id="{04B0F6AE-0415-1338-650D-47D7364503A1}"/>
               </a:ext>
             </a:extLst>
           </p:cNvPr>
@@ -2835,7 +2835,7 @@
           <p:cNvPr id="4" name="テキスト プレースホルダー 3">
             <a:extLst>
               <a:ext uri="{FF2B5EF4-FFF2-40B4-BE49-F238E27FC236}">
-                <a16:creationId xmlns:a16="http://schemas.microsoft.com/office/drawing/2014/main" id="{013BA6D8-AA5C-5194-BE3F-5708884C59A3}"/>
+                <a16:creationId xmlns:a16="http://schemas.microsoft.com/office/drawing/2014/main" id="{57161E27-4867-B211-40DE-74B293BD2F18}"/>
               </a:ext>
             </a:extLst>
           </p:cNvPr>
@@ -2906,7 +2906,7 @@
           <p:cNvPr id="5" name="日付プレースホルダー 4">
             <a:extLst>
               <a:ext uri="{FF2B5EF4-FFF2-40B4-BE49-F238E27FC236}">
-                <a16:creationId xmlns:a16="http://schemas.microsoft.com/office/drawing/2014/main" id="{1B2F5845-B597-0AE9-C0CC-E8C5D7A469D5}"/>
+                <a16:creationId xmlns:a16="http://schemas.microsoft.com/office/drawing/2014/main" id="{28C98F58-B227-3B43-CF4B-EDEDF93B8D94}"/>
               </a:ext>
             </a:extLst>
           </p:cNvPr>
@@ -2922,7 +2922,7 @@
           <a:bodyPr/>
           <a:lstStyle/>
           <a:p>
-            <a:fld id="{5C512680-44CC-4CE7-BD28-AA82A0A324C6}" type="datetimeFigureOut">
+            <a:fld id="{3B398E8E-E6C4-45B5-B268-4B5D9A817247}" type="datetimeFigureOut">
               <a:rPr kumimoji="1" lang="ja-JP" altLang="en-US" smtClean="0"/>
               <a:t>2026/7/30</a:t>
             </a:fld>
@@ -2935,7 +2935,7 @@
           <p:cNvPr id="6" name="フッター プレースホルダー 5">
             <a:extLst>
               <a:ext uri="{FF2B5EF4-FFF2-40B4-BE49-F238E27FC236}">
-                <a16:creationId xmlns:a16="http://schemas.microsoft.com/office/drawing/2014/main" id="{214C4BCC-FA78-9223-E885-AEF225C26A02}"/>
+                <a16:creationId xmlns:a16="http://schemas.microsoft.com/office/drawing/2014/main" id="{E71DEF92-0D3F-2E2A-4227-835036E237C3}"/>
               </a:ext>
             </a:extLst>
           </p:cNvPr>
@@ -2960,7 +2960,7 @@
           <p:cNvPr id="7" name="スライド番号プレースホルダー 6">
             <a:extLst>
               <a:ext uri="{FF2B5EF4-FFF2-40B4-BE49-F238E27FC236}">
-                <a16:creationId xmlns:a16="http://schemas.microsoft.com/office/drawing/2014/main" id="{6D6181B7-5C9A-745A-CAC3-3B39E9C34080}"/>
+                <a16:creationId xmlns:a16="http://schemas.microsoft.com/office/drawing/2014/main" id="{5ED9BF16-F8AD-69E3-FC62-8E5F1482612E}"/>
               </a:ext>
             </a:extLst>
           </p:cNvPr>
@@ -2976,7 +2976,7 @@
           <a:bodyPr/>
           <a:lstStyle/>
           <a:p>
-            <a:fld id="{4C965095-4EB8-4F68-B4CD-F834088C81C9}" type="slidenum">
+            <a:fld id="{6B13FFE0-42E4-41C4-B6AA-0447AC4C2603}" type="slidenum">
               <a:rPr kumimoji="1" lang="ja-JP" altLang="en-US" smtClean="0"/>
               <a:t>‹#›</a:t>
             </a:fld>
@@ -2987,7 +2987,7 @@
     </p:spTree>
     <p:extLst>
       <p:ext uri="{BB962C8B-B14F-4D97-AF65-F5344CB8AC3E}">
-        <p14:creationId xmlns:p14="http://schemas.microsoft.com/office/powerpoint/2010/main" val="2092876178"/>
+        <p14:creationId xmlns:p14="http://schemas.microsoft.com/office/powerpoint/2010/main" val="2280674763"/>
       </p:ext>
     </p:extLst>
   </p:cSld>
@@ -3024,7 +3024,7 @@
           <p:cNvPr id="2" name="タイトル プレースホルダー 1">
             <a:extLst>
               <a:ext uri="{FF2B5EF4-FFF2-40B4-BE49-F238E27FC236}">
-                <a16:creationId xmlns:a16="http://schemas.microsoft.com/office/drawing/2014/main" id="{A4E43B85-C07C-966F-C125-322622B54921}"/>
+                <a16:creationId xmlns:a16="http://schemas.microsoft.com/office/drawing/2014/main" id="{0603BE8C-DDAC-5227-A129-7767DB2322A7}"/>
               </a:ext>
             </a:extLst>
           </p:cNvPr>
@@ -3062,7 +3062,7 @@
           <p:cNvPr id="3" name="テキスト プレースホルダー 2">
             <a:extLst>
               <a:ext uri="{FF2B5EF4-FFF2-40B4-BE49-F238E27FC236}">
-                <a16:creationId xmlns:a16="http://schemas.microsoft.com/office/drawing/2014/main" id="{C3E62BA0-4306-CF04-8E60-9A326FD80B10}"/>
+                <a16:creationId xmlns:a16="http://schemas.microsoft.com/office/drawing/2014/main" id="{130FBE31-14B0-F674-C6EA-73E042ED7E82}"/>
               </a:ext>
             </a:extLst>
           </p:cNvPr>
@@ -3161,7 +3161,7 @@
           <p:cNvPr id="4" name="日付プレースホルダー 3">
             <a:extLst>
               <a:ext uri="{FF2B5EF4-FFF2-40B4-BE49-F238E27FC236}">
-                <a16:creationId xmlns:a16="http://schemas.microsoft.com/office/drawing/2014/main" id="{49EF3DFC-2183-E9C7-81E6-B0954AFF10C9}"/>
+                <a16:creationId xmlns:a16="http://schemas.microsoft.com/office/drawing/2014/main" id="{27FAA381-B44F-440A-DB5C-35BD7DCCFE79}"/>
               </a:ext>
             </a:extLst>
           </p:cNvPr>
@@ -3195,7 +3195,7 @@
             </a:lvl1pPr>
           </a:lstStyle>
           <a:p>
-            <a:fld id="{5C512680-44CC-4CE7-BD28-AA82A0A324C6}" type="datetimeFigureOut">
+            <a:fld id="{3B398E8E-E6C4-45B5-B268-4B5D9A817247}" type="datetimeFigureOut">
               <a:rPr kumimoji="1" lang="ja-JP" altLang="en-US" smtClean="0"/>
               <a:t>2026/7/30</a:t>
             </a:fld>
@@ -3208,7 +3208,7 @@
           <p:cNvPr id="5" name="フッター プレースホルダー 4">
             <a:extLst>
               <a:ext uri="{FF2B5EF4-FFF2-40B4-BE49-F238E27FC236}">
-                <a16:creationId xmlns:a16="http://schemas.microsoft.com/office/drawing/2014/main" id="{2437C715-848C-B4C1-0E70-DAB1C7FB7B88}"/>
+                <a16:creationId xmlns:a16="http://schemas.microsoft.com/office/drawing/2014/main" id="{15485A70-80EF-BB19-E137-AB5D2A888F97}"/>
               </a:ext>
             </a:extLst>
           </p:cNvPr>
@@ -3251,7 +3251,7 @@
           <p:cNvPr id="6" name="スライド番号プレースホルダー 5">
             <a:extLst>
               <a:ext uri="{FF2B5EF4-FFF2-40B4-BE49-F238E27FC236}">
-                <a16:creationId xmlns:a16="http://schemas.microsoft.com/office/drawing/2014/main" id="{434B776D-3231-0F67-CDB0-994CF2397F81}"/>
+                <a16:creationId xmlns:a16="http://schemas.microsoft.com/office/drawing/2014/main" id="{F7ECAE10-DE96-D6AF-A033-5E7AEBEE7254}"/>
               </a:ext>
             </a:extLst>
           </p:cNvPr>
@@ -3285,7 +3285,7 @@
             </a:lvl1pPr>
           </a:lstStyle>
           <a:p>
-            <a:fld id="{4C965095-4EB8-4F68-B4CD-F834088C81C9}" type="slidenum">
+            <a:fld id="{6B13FFE0-42E4-41C4-B6AA-0447AC4C2603}" type="slidenum">
               <a:rPr kumimoji="1" lang="ja-JP" altLang="en-US" smtClean="0"/>
               <a:t>‹#›</a:t>
             </a:fld>
@@ -3296,7 +3296,7 @@
     </p:spTree>
     <p:extLst>
       <p:ext uri="{BB962C8B-B14F-4D97-AF65-F5344CB8AC3E}">
-        <p14:creationId xmlns:p14="http://schemas.microsoft.com/office/powerpoint/2010/main" val="20609546"/>
+        <p14:creationId xmlns:p14="http://schemas.microsoft.com/office/powerpoint/2010/main" val="89046417"/>
       </p:ext>
     </p:extLst>
   </p:cSld>
@@ -3619,7 +3619,7 @@
           <p:cNvPr id="2" name="テキスト ボックス 1">
             <a:extLst>
               <a:ext uri="{FF2B5EF4-FFF2-40B4-BE49-F238E27FC236}">
-                <a16:creationId xmlns:a16="http://schemas.microsoft.com/office/drawing/2014/main" id="{484082C1-54B7-8E74-F0D6-F731724822DA}"/>
+                <a16:creationId xmlns:a16="http://schemas.microsoft.com/office/drawing/2014/main" id="{62723B92-4836-EEC5-0A2E-3620ECD1213D}"/>
               </a:ext>
             </a:extLst>
           </p:cNvPr>
@@ -3665,7 +3665,7 @@
           <p:cNvPr id="3" name="テキスト ボックス 2">
             <a:extLst>
               <a:ext uri="{FF2B5EF4-FFF2-40B4-BE49-F238E27FC236}">
-                <a16:creationId xmlns:a16="http://schemas.microsoft.com/office/drawing/2014/main" id="{C49F52AB-3E09-7429-66B0-38DD7230E834}"/>
+                <a16:creationId xmlns:a16="http://schemas.microsoft.com/office/drawing/2014/main" id="{7BE71435-A789-B55C-D8D6-20F1E099A9CF}"/>
               </a:ext>
             </a:extLst>
           </p:cNvPr>
@@ -3695,14 +3695,17 @@
                 </a:solidFill>
                 <a:latin typeface="Arial" panose="020B0604020202020204" pitchFamily="34" charset="0"/>
               </a:rPr>
-              <a:t>akira-special TECH EXPLANATION</a:t>
-            </a:r>
-            <a:endParaRPr kumimoji="1" lang="ja-JP" altLang="en-US" sz="3400" b="1">
-              <a:solidFill>
-                <a:srgbClr val="111111"/>
-              </a:solidFill>
-              <a:latin typeface="Arial" panose="020B0604020202020204" pitchFamily="34" charset="0"/>
-            </a:endParaRPr>
+              <a:t>Akira Special</a:t>
+            </a:r>
+            <a:r>
+              <a:rPr kumimoji="1" lang="ja-JP" altLang="en-US" sz="3400" b="1">
+                <a:solidFill>
+                  <a:srgbClr val="111111"/>
+                </a:solidFill>
+                <a:latin typeface="Arial" panose="020B0604020202020204" pitchFamily="34" charset="0"/>
+              </a:rPr>
+              <a:t>の技術解説</a:t>
+            </a:r>
           </a:p>
         </p:txBody>
       </p:sp>
@@ -3711,7 +3714,7 @@
           <p:cNvPr id="4" name="テキスト ボックス 3">
             <a:extLst>
               <a:ext uri="{FF2B5EF4-FFF2-40B4-BE49-F238E27FC236}">
-                <a16:creationId xmlns:a16="http://schemas.microsoft.com/office/drawing/2014/main" id="{8C3A9D2F-7FB8-213E-6DED-66FF6EBC3569}"/>
+                <a16:creationId xmlns:a16="http://schemas.microsoft.com/office/drawing/2014/main" id="{28232915-B138-09C3-F354-89086C862361}"/>
               </a:ext>
             </a:extLst>
           </p:cNvPr>
@@ -3735,20 +3738,14 @@
           <a:lstStyle/>
           <a:p>
             <a:r>
-              <a:rPr kumimoji="1" lang="en-US" altLang="ja-JP" sz="2000">
+              <a:rPr kumimoji="1" lang="ja-JP" altLang="en-US" sz="2000">
                 <a:solidFill>
                   <a:srgbClr val="333333"/>
                 </a:solidFill>
                 <a:latin typeface="Arial" panose="020B0604020202020204" pitchFamily="34" charset="0"/>
               </a:rPr>
-              <a:t>Architecture, implementation and commit history in 75 seconds</a:t>
-            </a:r>
-            <a:endParaRPr kumimoji="1" lang="ja-JP" altLang="en-US" sz="2000">
-              <a:solidFill>
-                <a:srgbClr val="333333"/>
-              </a:solidFill>
-              <a:latin typeface="Arial" panose="020B0604020202020204" pitchFamily="34" charset="0"/>
-            </a:endParaRPr>
+              <a:t>設計・実装・コミットから学ぶ短時間プレビュー</a:t>
+            </a:r>
           </a:p>
         </p:txBody>
       </p:sp>
@@ -3757,7 +3754,7 @@
           <p:cNvPr id="5" name="テキスト ボックス 4">
             <a:extLst>
               <a:ext uri="{FF2B5EF4-FFF2-40B4-BE49-F238E27FC236}">
-                <a16:creationId xmlns:a16="http://schemas.microsoft.com/office/drawing/2014/main" id="{4D6D1996-55BA-8B13-BB1B-73FE32C1A17B}"/>
+                <a16:creationId xmlns:a16="http://schemas.microsoft.com/office/drawing/2014/main" id="{E9AB9379-79B2-CA6E-7F22-97622E0AD321}"/>
               </a:ext>
             </a:extLst>
           </p:cNvPr>
@@ -3804,7 +3801,7 @@
             <a:hlinkClick r:id="" action="ppaction://media"/>
             <a:extLst>
               <a:ext uri="{FF2B5EF4-FFF2-40B4-BE49-F238E27FC236}">
-                <a16:creationId xmlns:a16="http://schemas.microsoft.com/office/drawing/2014/main" id="{7260F333-9457-DF31-06A7-1DF1E4B0D938}"/>
+                <a16:creationId xmlns:a16="http://schemas.microsoft.com/office/drawing/2014/main" id="{B8228EB9-47EA-17A8-21BB-EED163175DA4}"/>
               </a:ext>
             </a:extLst>
           </p:cNvPr>
@@ -3839,7 +3836,7 @@
     </p:spTree>
     <p:extLst>
       <p:ext uri="{BB962C8B-B14F-4D97-AF65-F5344CB8AC3E}">
-        <p14:creationId xmlns:p14="http://schemas.microsoft.com/office/powerpoint/2010/main" val="928170298"/>
+        <p14:creationId xmlns:p14="http://schemas.microsoft.com/office/powerpoint/2010/main" val="1794233051"/>
       </p:ext>
     </p:extLst>
   </p:cSld>
@@ -3963,7 +3960,7 @@
           <p:cNvPr id="2" name="テキスト ボックス 1">
             <a:extLst>
               <a:ext uri="{FF2B5EF4-FFF2-40B4-BE49-F238E27FC236}">
-                <a16:creationId xmlns:a16="http://schemas.microsoft.com/office/drawing/2014/main" id="{06403EC8-B0A6-2CAD-67A9-92545A8794C0}"/>
+                <a16:creationId xmlns:a16="http://schemas.microsoft.com/office/drawing/2014/main" id="{1EA8B07D-0178-745D-FF0B-CFA4439AAEB8}"/>
               </a:ext>
             </a:extLst>
           </p:cNvPr>
@@ -4009,7 +4006,7 @@
           <p:cNvPr id="3" name="テキスト ボックス 2">
             <a:extLst>
               <a:ext uri="{FF2B5EF4-FFF2-40B4-BE49-F238E27FC236}">
-                <a16:creationId xmlns:a16="http://schemas.microsoft.com/office/drawing/2014/main" id="{2BC7833F-497F-5861-95F5-A9BA65102D94}"/>
+                <a16:creationId xmlns:a16="http://schemas.microsoft.com/office/drawing/2014/main" id="{C61F3320-E149-AF2F-1FAD-F00A5E53773E}"/>
               </a:ext>
             </a:extLst>
           </p:cNvPr>
@@ -4033,20 +4030,14 @@
           <a:lstStyle/>
           <a:p>
             <a:r>
-              <a:rPr kumimoji="1" lang="en-US" altLang="ja-JP" sz="3400" b="1">
+              <a:rPr kumimoji="1" lang="ja-JP" altLang="en-US" sz="3400" b="1">
                 <a:solidFill>
                   <a:srgbClr val="111111"/>
                 </a:solidFill>
                 <a:latin typeface="Arial" panose="020B0604020202020204" pitchFamily="34" charset="0"/>
               </a:rPr>
-              <a:t>WHAT DOES IT SOLVE?</a:t>
-            </a:r>
-            <a:endParaRPr kumimoji="1" lang="ja-JP" altLang="en-US" sz="3400" b="1">
-              <a:solidFill>
-                <a:srgbClr val="111111"/>
-              </a:solidFill>
-              <a:latin typeface="Arial" panose="020B0604020202020204" pitchFamily="34" charset="0"/>
-            </a:endParaRPr>
+              <a:t>このプロジェクトは何を解決する？</a:t>
+            </a:r>
           </a:p>
         </p:txBody>
       </p:sp>
@@ -4055,7 +4046,7 @@
           <p:cNvPr id="4" name="テキスト ボックス 3">
             <a:extLst>
               <a:ext uri="{FF2B5EF4-FFF2-40B4-BE49-F238E27FC236}">
-                <a16:creationId xmlns:a16="http://schemas.microsoft.com/office/drawing/2014/main" id="{75765098-13C2-59C1-3F20-A335B55602FC}"/>
+                <a16:creationId xmlns:a16="http://schemas.microsoft.com/office/drawing/2014/main" id="{66537DED-02EB-FDB5-3EE8-34B810E56202}"/>
               </a:ext>
             </a:extLst>
           </p:cNvPr>
@@ -4101,7 +4092,7 @@
           <p:cNvPr id="5" name="テキスト ボックス 4">
             <a:extLst>
               <a:ext uri="{FF2B5EF4-FFF2-40B4-BE49-F238E27FC236}">
-                <a16:creationId xmlns:a16="http://schemas.microsoft.com/office/drawing/2014/main" id="{2756F1CA-68D5-2684-FED4-EAF822A3333C}"/>
+                <a16:creationId xmlns:a16="http://schemas.microsoft.com/office/drawing/2014/main" id="{388A5CE9-7C46-52B6-54F1-911C74A9AD08}"/>
               </a:ext>
             </a:extLst>
           </p:cNvPr>
@@ -4148,7 +4139,7 @@
             <a:hlinkClick r:id="" action="ppaction://media"/>
             <a:extLst>
               <a:ext uri="{FF2B5EF4-FFF2-40B4-BE49-F238E27FC236}">
-                <a16:creationId xmlns:a16="http://schemas.microsoft.com/office/drawing/2014/main" id="{72992667-92A4-8A06-074B-1727C55E8570}"/>
+                <a16:creationId xmlns:a16="http://schemas.microsoft.com/office/drawing/2014/main" id="{E94715E5-3669-A6A6-9EE7-D39F38285449}"/>
               </a:ext>
             </a:extLst>
           </p:cNvPr>
@@ -4183,7 +4174,7 @@
     </p:spTree>
     <p:extLst>
       <p:ext uri="{BB962C8B-B14F-4D97-AF65-F5344CB8AC3E}">
-        <p14:creationId xmlns:p14="http://schemas.microsoft.com/office/powerpoint/2010/main" val="1163913284"/>
+        <p14:creationId xmlns:p14="http://schemas.microsoft.com/office/powerpoint/2010/main" val="3087594442"/>
       </p:ext>
     </p:extLst>
   </p:cSld>
@@ -4307,7 +4298,7 @@
           <p:cNvPr id="2" name="テキスト ボックス 1">
             <a:extLst>
               <a:ext uri="{FF2B5EF4-FFF2-40B4-BE49-F238E27FC236}">
-                <a16:creationId xmlns:a16="http://schemas.microsoft.com/office/drawing/2014/main" id="{2BFA867F-39E2-5CB4-DFE6-0789FA218847}"/>
+                <a16:creationId xmlns:a16="http://schemas.microsoft.com/office/drawing/2014/main" id="{B0F9CD23-B23C-4B43-7F22-39CF0AADA7EF}"/>
               </a:ext>
             </a:extLst>
           </p:cNvPr>
@@ -4353,7 +4344,7 @@
           <p:cNvPr id="3" name="テキスト ボックス 2">
             <a:extLst>
               <a:ext uri="{FF2B5EF4-FFF2-40B4-BE49-F238E27FC236}">
-                <a16:creationId xmlns:a16="http://schemas.microsoft.com/office/drawing/2014/main" id="{E4B6C8B9-4C41-FC34-4ADE-698595498726}"/>
+                <a16:creationId xmlns:a16="http://schemas.microsoft.com/office/drawing/2014/main" id="{BA121022-87BB-2BB4-208D-9CF98BF22643}"/>
               </a:ext>
             </a:extLst>
           </p:cNvPr>
@@ -4377,20 +4368,14 @@
           <a:lstStyle/>
           <a:p>
             <a:r>
-              <a:rPr kumimoji="1" lang="en-US" altLang="ja-JP" sz="3400" b="1">
+              <a:rPr kumimoji="1" lang="ja-JP" altLang="en-US" sz="3400" b="1">
                 <a:solidFill>
                   <a:srgbClr val="111111"/>
                 </a:solidFill>
                 <a:latin typeface="Arial" panose="020B0604020202020204" pitchFamily="34" charset="0"/>
               </a:rPr>
-              <a:t>TECH STACK</a:t>
-            </a:r>
-            <a:endParaRPr kumimoji="1" lang="ja-JP" altLang="en-US" sz="3400" b="1">
-              <a:solidFill>
-                <a:srgbClr val="111111"/>
-              </a:solidFill>
-              <a:latin typeface="Arial" panose="020B0604020202020204" pitchFamily="34" charset="0"/>
-            </a:endParaRPr>
+              <a:t>技術スタック</a:t>
+            </a:r>
           </a:p>
         </p:txBody>
       </p:sp>
@@ -4399,7 +4384,7 @@
           <p:cNvPr id="4" name="テキスト ボックス 3">
             <a:extLst>
               <a:ext uri="{FF2B5EF4-FFF2-40B4-BE49-F238E27FC236}">
-                <a16:creationId xmlns:a16="http://schemas.microsoft.com/office/drawing/2014/main" id="{93012371-2910-04DE-598B-A0121CA414E5}"/>
+                <a16:creationId xmlns:a16="http://schemas.microsoft.com/office/drawing/2014/main" id="{99C3FE5B-9B01-801D-63BA-57398224577C}"/>
               </a:ext>
             </a:extLst>
           </p:cNvPr>
@@ -4409,7 +4394,7 @@
         <p:spPr>
           <a:xfrm>
             <a:off x="533400" y="3429000"/>
-            <a:ext cx="10795000" cy="400110"/>
+            <a:ext cx="10795000" cy="707886"/>
           </a:xfrm>
           <a:prstGeom prst="rect">
             <a:avLst/>
@@ -4423,13 +4408,22 @@
           <a:lstStyle/>
           <a:p>
             <a:r>
+              <a:rPr kumimoji="1" lang="ja-JP" altLang="en-US" sz="2000">
+                <a:solidFill>
+                  <a:srgbClr val="333333"/>
+                </a:solidFill>
+                <a:latin typeface="Arial" panose="020B0604020202020204" pitchFamily="34" charset="0"/>
+              </a:rPr>
+              <a:t>主要技術：</a:t>
+            </a:r>
+            <a:r>
               <a:rPr kumimoji="1" lang="en-US" altLang="ja-JP" sz="2000">
                 <a:solidFill>
                   <a:srgbClr val="333333"/>
                 </a:solidFill>
                 <a:latin typeface="Arial" panose="020B0604020202020204" pitchFamily="34" charset="0"/>
               </a:rPr>
-              <a:t>Primary technologies: TypeScript</a:t>
+              <a:t>TypeScript</a:t>
             </a:r>
             <a:r>
               <a:rPr kumimoji="1" lang="ja-JP" altLang="en-US" sz="2000">
@@ -4465,14 +4459,18 @@
                 </a:solidFill>
                 <a:latin typeface="Arial" panose="020B0604020202020204" pitchFamily="34" charset="0"/>
               </a:rPr>
-              <a:t>JavaScript</a:t>
-            </a:r>
-            <a:endParaRPr kumimoji="1" lang="ja-JP" altLang="en-US" sz="2000">
-              <a:solidFill>
-                <a:srgbClr val="333333"/>
-              </a:solidFill>
-              <a:latin typeface="Arial" panose="020B0604020202020204" pitchFamily="34" charset="0"/>
-            </a:endParaRPr>
+              <a:t>JavaScript
+</a:t>
+            </a:r>
+            <a:r>
+              <a:rPr kumimoji="1" lang="ja-JP" altLang="en-US" sz="2000">
+                <a:solidFill>
+                  <a:srgbClr val="333333"/>
+                </a:solidFill>
+                <a:latin typeface="Arial" panose="020B0604020202020204" pitchFamily="34" charset="0"/>
+              </a:rPr>
+              <a:t>役割を分け、保守しやすい構成を目指しています。</a:t>
+            </a:r>
           </a:p>
         </p:txBody>
       </p:sp>
@@ -4481,7 +4479,7 @@
           <p:cNvPr id="5" name="テキスト ボックス 4">
             <a:extLst>
               <a:ext uri="{FF2B5EF4-FFF2-40B4-BE49-F238E27FC236}">
-                <a16:creationId xmlns:a16="http://schemas.microsoft.com/office/drawing/2014/main" id="{2FAE45F2-62E5-041D-3055-0673D81177CA}"/>
+                <a16:creationId xmlns:a16="http://schemas.microsoft.com/office/drawing/2014/main" id="{C1AA86F6-CB7E-5860-680B-EC858706C366}"/>
               </a:ext>
             </a:extLst>
           </p:cNvPr>
@@ -4528,7 +4526,7 @@
             <a:hlinkClick r:id="" action="ppaction://media"/>
             <a:extLst>
               <a:ext uri="{FF2B5EF4-FFF2-40B4-BE49-F238E27FC236}">
-                <a16:creationId xmlns:a16="http://schemas.microsoft.com/office/drawing/2014/main" id="{84C965B9-93FA-0D5C-CF56-24EA8DC7C4C4}"/>
+                <a16:creationId xmlns:a16="http://schemas.microsoft.com/office/drawing/2014/main" id="{9B6E10A0-CACE-4286-5A6B-9E0FB5C9164D}"/>
               </a:ext>
             </a:extLst>
           </p:cNvPr>
@@ -4563,7 +4561,7 @@
     </p:spTree>
     <p:extLst>
       <p:ext uri="{BB962C8B-B14F-4D97-AF65-F5344CB8AC3E}">
-        <p14:creationId xmlns:p14="http://schemas.microsoft.com/office/powerpoint/2010/main" val="2886576"/>
+        <p14:creationId xmlns:p14="http://schemas.microsoft.com/office/powerpoint/2010/main" val="3721589284"/>
       </p:ext>
     </p:extLst>
   </p:cSld>
@@ -4687,7 +4685,7 @@
           <p:cNvPr id="2" name="テキスト ボックス 1">
             <a:extLst>
               <a:ext uri="{FF2B5EF4-FFF2-40B4-BE49-F238E27FC236}">
-                <a16:creationId xmlns:a16="http://schemas.microsoft.com/office/drawing/2014/main" id="{F0038370-7A74-7BCE-F06B-B9406FDCBB62}"/>
+                <a16:creationId xmlns:a16="http://schemas.microsoft.com/office/drawing/2014/main" id="{B460D4A0-7C3B-326D-BC45-97C9739FDCD9}"/>
               </a:ext>
             </a:extLst>
           </p:cNvPr>
@@ -4733,7 +4731,7 @@
           <p:cNvPr id="3" name="テキスト ボックス 2">
             <a:extLst>
               <a:ext uri="{FF2B5EF4-FFF2-40B4-BE49-F238E27FC236}">
-                <a16:creationId xmlns:a16="http://schemas.microsoft.com/office/drawing/2014/main" id="{880EDBE4-7C35-3398-1B1A-931ACC706E42}"/>
+                <a16:creationId xmlns:a16="http://schemas.microsoft.com/office/drawing/2014/main" id="{77EE8650-5244-3C08-43FF-7A8C4C0CC9E7}"/>
               </a:ext>
             </a:extLst>
           </p:cNvPr>
@@ -4757,20 +4755,14 @@
           <a:lstStyle/>
           <a:p>
             <a:r>
-              <a:rPr kumimoji="1" lang="en-US" altLang="ja-JP" sz="3400" b="1">
+              <a:rPr kumimoji="1" lang="ja-JP" altLang="en-US" sz="3400" b="1">
                 <a:solidFill>
                   <a:srgbClr val="111111"/>
                 </a:solidFill>
                 <a:latin typeface="Arial" panose="020B0604020202020204" pitchFamily="34" charset="0"/>
               </a:rPr>
-              <a:t>REPOSITORY HIGHLIGHTS</a:t>
-            </a:r>
-            <a:endParaRPr kumimoji="1" lang="ja-JP" altLang="en-US" sz="3400" b="1">
-              <a:solidFill>
-                <a:srgbClr val="111111"/>
-              </a:solidFill>
-              <a:latin typeface="Arial" panose="020B0604020202020204" pitchFamily="34" charset="0"/>
-            </a:endParaRPr>
+              <a:t>リポジトリの読みどころ</a:t>
+            </a:r>
           </a:p>
         </p:txBody>
       </p:sp>
@@ -4779,7 +4771,7 @@
           <p:cNvPr id="4" name="テキスト ボックス 3">
             <a:extLst>
               <a:ext uri="{FF2B5EF4-FFF2-40B4-BE49-F238E27FC236}">
-                <a16:creationId xmlns:a16="http://schemas.microsoft.com/office/drawing/2014/main" id="{2614EB4B-2C9B-D1E9-8F50-EF6BAB3D06DA}"/>
+                <a16:creationId xmlns:a16="http://schemas.microsoft.com/office/drawing/2014/main" id="{8F92EB68-6499-1E8E-01C0-E9A939017B08}"/>
               </a:ext>
             </a:extLst>
           </p:cNvPr>
@@ -4789,7 +4781,7 @@
         <p:spPr>
           <a:xfrm>
             <a:off x="533400" y="3429000"/>
-            <a:ext cx="10795000" cy="400110"/>
+            <a:ext cx="10795000" cy="707886"/>
           </a:xfrm>
           <a:prstGeom prst="rect">
             <a:avLst/>
@@ -4803,13 +4795,77 @@
           <a:lstStyle/>
           <a:p>
             <a:r>
+              <a:rPr kumimoji="1" lang="ja-JP" altLang="en-US" sz="2000">
+                <a:solidFill>
+                  <a:srgbClr val="333333"/>
+                </a:solidFill>
+                <a:latin typeface="Arial" panose="020B0604020202020204" pitchFamily="34" charset="0"/>
+              </a:rPr>
+              <a:t>公開コード、</a:t>
+            </a:r>
+            <a:r>
               <a:rPr kumimoji="1" lang="en-US" altLang="ja-JP" sz="2000">
                 <a:solidFill>
                   <a:srgbClr val="333333"/>
                 </a:solidFill>
                 <a:latin typeface="Arial" panose="020B0604020202020204" pitchFamily="34" charset="0"/>
               </a:rPr>
-              <a:t>Public source code, README and commit history reveal the design decisions.</a:t>
+              <a:t>README</a:t>
+            </a:r>
+            <a:r>
+              <a:rPr kumimoji="1" lang="ja-JP" altLang="en-US" sz="2000">
+                <a:solidFill>
+                  <a:srgbClr val="333333"/>
+                </a:solidFill>
+                <a:latin typeface="Arial" panose="020B0604020202020204" pitchFamily="34" charset="0"/>
+              </a:rPr>
+              <a:t>、コミット履歴から設計判断を確認できます。
+主なファイル：</a:t>
+            </a:r>
+            <a:r>
+              <a:rPr kumimoji="1" lang="en-US" altLang="ja-JP" sz="2000">
+                <a:solidFill>
+                  <a:srgbClr val="333333"/>
+                </a:solidFill>
+                <a:latin typeface="Arial" panose="020B0604020202020204" pitchFamily="34" charset="0"/>
+              </a:rPr>
+              <a:t>README.md</a:t>
+            </a:r>
+            <a:r>
+              <a:rPr kumimoji="1" lang="ja-JP" altLang="en-US" sz="2000">
+                <a:solidFill>
+                  <a:srgbClr val="333333"/>
+                </a:solidFill>
+                <a:latin typeface="Arial" panose="020B0604020202020204" pitchFamily="34" charset="0"/>
+              </a:rPr>
+              <a:t>、</a:t>
+            </a:r>
+            <a:r>
+              <a:rPr kumimoji="1" lang="en-US" altLang="ja-JP" sz="2000">
+                <a:solidFill>
+                  <a:srgbClr val="333333"/>
+                </a:solidFill>
+                <a:latin typeface="Arial" panose="020B0604020202020204" pitchFamily="34" charset="0"/>
+              </a:rPr>
+              <a:t>app</a:t>
+            </a:r>
+            <a:r>
+              <a:rPr kumimoji="1" lang="ja-JP" altLang="en-US" sz="2000">
+                <a:solidFill>
+                  <a:srgbClr val="333333"/>
+                </a:solidFill>
+                <a:latin typeface="Arial" panose="020B0604020202020204" pitchFamily="34" charset="0"/>
+              </a:rPr>
+              <a:t>、</a:t>
+            </a:r>
+            <a:r>
+              <a:rPr kumimoji="1" lang="en-US" altLang="ja-JP" sz="2000">
+                <a:solidFill>
+                  <a:srgbClr val="333333"/>
+                </a:solidFill>
+                <a:latin typeface="Arial" panose="020B0604020202020204" pitchFamily="34" charset="0"/>
+              </a:rPr>
+              <a:t>build</a:t>
             </a:r>
             <a:endParaRPr kumimoji="1" lang="ja-JP" altLang="en-US" sz="2000">
               <a:solidFill>
@@ -4825,7 +4881,7 @@
           <p:cNvPr id="5" name="テキスト ボックス 4">
             <a:extLst>
               <a:ext uri="{FF2B5EF4-FFF2-40B4-BE49-F238E27FC236}">
-                <a16:creationId xmlns:a16="http://schemas.microsoft.com/office/drawing/2014/main" id="{1445C5FC-31F1-E7AF-057D-F0C0F91C3802}"/>
+                <a16:creationId xmlns:a16="http://schemas.microsoft.com/office/drawing/2014/main" id="{918DAF41-452E-A4D2-27D0-5798C4FE4E18}"/>
               </a:ext>
             </a:extLst>
           </p:cNvPr>
@@ -4872,7 +4928,7 @@
             <a:hlinkClick r:id="" action="ppaction://media"/>
             <a:extLst>
               <a:ext uri="{FF2B5EF4-FFF2-40B4-BE49-F238E27FC236}">
-                <a16:creationId xmlns:a16="http://schemas.microsoft.com/office/drawing/2014/main" id="{F4903A7D-61E3-568D-43D4-31418BB814DC}"/>
+                <a16:creationId xmlns:a16="http://schemas.microsoft.com/office/drawing/2014/main" id="{1F7CD9E9-AFC4-E298-F468-38F614BBAD9D}"/>
               </a:ext>
             </a:extLst>
           </p:cNvPr>
@@ -4907,7 +4963,7 @@
     </p:spTree>
     <p:extLst>
       <p:ext uri="{BB962C8B-B14F-4D97-AF65-F5344CB8AC3E}">
-        <p14:creationId xmlns:p14="http://schemas.microsoft.com/office/powerpoint/2010/main" val="2930638720"/>
+        <p14:creationId xmlns:p14="http://schemas.microsoft.com/office/powerpoint/2010/main" val="2998322304"/>
       </p:ext>
     </p:extLst>
   </p:cSld>
@@ -5031,7 +5087,7 @@
           <p:cNvPr id="2" name="テキスト ボックス 1">
             <a:extLst>
               <a:ext uri="{FF2B5EF4-FFF2-40B4-BE49-F238E27FC236}">
-                <a16:creationId xmlns:a16="http://schemas.microsoft.com/office/drawing/2014/main" id="{79A8051F-01ED-A800-236D-ED12D35E1D06}"/>
+                <a16:creationId xmlns:a16="http://schemas.microsoft.com/office/drawing/2014/main" id="{A812339D-4806-CC4D-B022-53288A4D68F9}"/>
               </a:ext>
             </a:extLst>
           </p:cNvPr>
@@ -5077,7 +5133,7 @@
           <p:cNvPr id="3" name="テキスト ボックス 2">
             <a:extLst>
               <a:ext uri="{FF2B5EF4-FFF2-40B4-BE49-F238E27FC236}">
-                <a16:creationId xmlns:a16="http://schemas.microsoft.com/office/drawing/2014/main" id="{A4C3886E-876E-B722-216D-94A79CCB47B9}"/>
+                <a16:creationId xmlns:a16="http://schemas.microsoft.com/office/drawing/2014/main" id="{05416777-0FB2-A40D-D158-53FF7887889B}"/>
               </a:ext>
             </a:extLst>
           </p:cNvPr>
@@ -5101,20 +5157,14 @@
           <a:lstStyle/>
           <a:p>
             <a:r>
-              <a:rPr kumimoji="1" lang="en-US" altLang="ja-JP" sz="3400" b="1">
+              <a:rPr kumimoji="1" lang="ja-JP" altLang="en-US" sz="3400" b="1">
                 <a:solidFill>
                   <a:srgbClr val="111111"/>
                 </a:solidFill>
                 <a:latin typeface="Arial" panose="020B0604020202020204" pitchFamily="34" charset="0"/>
               </a:rPr>
-              <a:t>ITERATIVE IMPROVEMENT</a:t>
-            </a:r>
-            <a:endParaRPr kumimoji="1" lang="ja-JP" altLang="en-US" sz="3400" b="1">
-              <a:solidFill>
-                <a:srgbClr val="111111"/>
-              </a:solidFill>
-              <a:latin typeface="Arial" panose="020B0604020202020204" pitchFamily="34" charset="0"/>
-            </a:endParaRPr>
+              <a:t>コミットから分かる改善</a:t>
+            </a:r>
           </a:p>
         </p:txBody>
       </p:sp>
@@ -5123,7 +5173,7 @@
           <p:cNvPr id="4" name="テキスト ボックス 3">
             <a:extLst>
               <a:ext uri="{FF2B5EF4-FFF2-40B4-BE49-F238E27FC236}">
-                <a16:creationId xmlns:a16="http://schemas.microsoft.com/office/drawing/2014/main" id="{F10E6F70-BF12-5C8B-7E9F-0C4900D83333}"/>
+                <a16:creationId xmlns:a16="http://schemas.microsoft.com/office/drawing/2014/main" id="{6A747F54-27EB-427F-68DC-EE61FCF8A897}"/>
               </a:ext>
             </a:extLst>
           </p:cNvPr>
@@ -5153,7 +5203,7 @@
                 </a:solidFill>
                 <a:latin typeface="Arial" panose="020B0604020202020204" pitchFamily="34" charset="0"/>
               </a:rPr>
-              <a:t>Small commits continuously improve features, quality and release readiness.</a:t>
+              <a:t>Improve beginner arcade-stick UX in app/globals.css</a:t>
             </a:r>
             <a:endParaRPr kumimoji="1" lang="ja-JP" altLang="en-US" sz="2000">
               <a:solidFill>
@@ -5169,7 +5219,7 @@
           <p:cNvPr id="5" name="テキスト ボックス 4">
             <a:extLst>
               <a:ext uri="{FF2B5EF4-FFF2-40B4-BE49-F238E27FC236}">
-                <a16:creationId xmlns:a16="http://schemas.microsoft.com/office/drawing/2014/main" id="{0AEB21BB-0868-3836-7ECC-CA7A5C5716DE}"/>
+                <a16:creationId xmlns:a16="http://schemas.microsoft.com/office/drawing/2014/main" id="{4545D931-E050-B550-551E-3C5927B93A1C}"/>
               </a:ext>
             </a:extLst>
           </p:cNvPr>
@@ -5216,7 +5266,7 @@
             <a:hlinkClick r:id="" action="ppaction://media"/>
             <a:extLst>
               <a:ext uri="{FF2B5EF4-FFF2-40B4-BE49-F238E27FC236}">
-                <a16:creationId xmlns:a16="http://schemas.microsoft.com/office/drawing/2014/main" id="{8D807139-0571-76DD-00C5-DEE3C5527BB4}"/>
+                <a16:creationId xmlns:a16="http://schemas.microsoft.com/office/drawing/2014/main" id="{3F327351-2153-ABE2-CF85-43F7959912E1}"/>
               </a:ext>
             </a:extLst>
           </p:cNvPr>
@@ -5251,7 +5301,7 @@
     </p:spTree>
     <p:extLst>
       <p:ext uri="{BB962C8B-B14F-4D97-AF65-F5344CB8AC3E}">
-        <p14:creationId xmlns:p14="http://schemas.microsoft.com/office/powerpoint/2010/main" val="3589401950"/>
+        <p14:creationId xmlns:p14="http://schemas.microsoft.com/office/powerpoint/2010/main" val="698749732"/>
       </p:ext>
     </p:extLst>
   </p:cSld>
@@ -5375,7 +5425,7 @@
           <p:cNvPr id="2" name="テキスト ボックス 1">
             <a:extLst>
               <a:ext uri="{FF2B5EF4-FFF2-40B4-BE49-F238E27FC236}">
-                <a16:creationId xmlns:a16="http://schemas.microsoft.com/office/drawing/2014/main" id="{A47F5EDA-3373-0FEC-4112-D01C3D542690}"/>
+                <a16:creationId xmlns:a16="http://schemas.microsoft.com/office/drawing/2014/main" id="{829B1977-18AF-98FB-8ACA-5BF41AA8F909}"/>
               </a:ext>
             </a:extLst>
           </p:cNvPr>
@@ -5421,7 +5471,7 @@
           <p:cNvPr id="3" name="テキスト ボックス 2">
             <a:extLst>
               <a:ext uri="{FF2B5EF4-FFF2-40B4-BE49-F238E27FC236}">
-                <a16:creationId xmlns:a16="http://schemas.microsoft.com/office/drawing/2014/main" id="{1DC858DD-22C7-DC09-2D9B-F23AAE56E3B0}"/>
+                <a16:creationId xmlns:a16="http://schemas.microsoft.com/office/drawing/2014/main" id="{AE6D21A0-AF11-7432-7F1B-2BD8071C18D0}"/>
               </a:ext>
             </a:extLst>
           </p:cNvPr>
@@ -5445,20 +5495,14 @@
           <a:lstStyle/>
           <a:p>
             <a:r>
-              <a:rPr kumimoji="1" lang="en-US" altLang="ja-JP" sz="3400" b="1">
+              <a:rPr kumimoji="1" lang="ja-JP" altLang="en-US" sz="3400" b="1">
                 <a:solidFill>
                   <a:srgbClr val="111111"/>
                 </a:solidFill>
                 <a:latin typeface="Arial" panose="020B0604020202020204" pitchFamily="34" charset="0"/>
               </a:rPr>
-              <a:t>READ THE FULL ARTICLE</a:t>
-            </a:r>
-            <a:endParaRPr kumimoji="1" lang="ja-JP" altLang="en-US" sz="3400" b="1">
-              <a:solidFill>
-                <a:srgbClr val="111111"/>
-              </a:solidFill>
-              <a:latin typeface="Arial" panose="020B0604020202020204" pitchFamily="34" charset="0"/>
-            </a:endParaRPr>
+              <a:t>詳しくは積み上げログへ</a:t>
+            </a:r>
           </a:p>
         </p:txBody>
       </p:sp>
@@ -5467,7 +5511,7 @@
           <p:cNvPr id="4" name="テキスト ボックス 3">
             <a:extLst>
               <a:ext uri="{FF2B5EF4-FFF2-40B4-BE49-F238E27FC236}">
-                <a16:creationId xmlns:a16="http://schemas.microsoft.com/office/drawing/2014/main" id="{115081C7-0D49-D99F-8674-6994FD9EE24F}"/>
+                <a16:creationId xmlns:a16="http://schemas.microsoft.com/office/drawing/2014/main" id="{70FCF395-70A1-F184-C030-99856634C240}"/>
               </a:ext>
             </a:extLst>
           </p:cNvPr>
@@ -5491,14 +5535,32 @@
           <a:lstStyle/>
           <a:p>
             <a:r>
-              <a:rPr kumimoji="1" lang="sv-SE" altLang="ja-JP" sz="2000">
+              <a:rPr kumimoji="1" lang="zh-TW" altLang="en-US" sz="2000">
+                <a:solidFill>
+                  <a:srgbClr val="333333"/>
+                </a:solidFill>
+                <a:latin typeface="Arial" panose="020B0604020202020204" pitchFamily="34" charset="0"/>
+              </a:rPr>
+              <a:t>記事： </a:t>
+            </a:r>
+            <a:r>
+              <a:rPr kumimoji="1" lang="en-US" altLang="zh-TW" sz="2000">
                 <a:solidFill>
                   <a:srgbClr val="333333"/>
                 </a:solidFill>
                 <a:latin typeface="Arial" panose="020B0604020202020204" pitchFamily="34" charset="0"/>
               </a:rPr>
               <a:t>https://syunnjack.dev/articles/akira-special
-TSUMIAGE LOG</a:t>
+</a:t>
+            </a:r>
+            <a:r>
+              <a:rPr kumimoji="1" lang="zh-TW" altLang="en-US" sz="2000">
+                <a:solidFill>
+                  <a:srgbClr val="333333"/>
+                </a:solidFill>
+                <a:latin typeface="Arial" panose="020B0604020202020204" pitchFamily="34" charset="0"/>
+              </a:rPr>
+              <a:t>学び、作り、振り返る開発記録。</a:t>
             </a:r>
             <a:endParaRPr kumimoji="1" lang="ja-JP" altLang="en-US" sz="2000">
               <a:solidFill>
@@ -5514,7 +5576,7 @@
           <p:cNvPr id="5" name="テキスト ボックス 4">
             <a:extLst>
               <a:ext uri="{FF2B5EF4-FFF2-40B4-BE49-F238E27FC236}">
-                <a16:creationId xmlns:a16="http://schemas.microsoft.com/office/drawing/2014/main" id="{5D5E0152-2692-A13B-5C03-3775F4DB5023}"/>
+                <a16:creationId xmlns:a16="http://schemas.microsoft.com/office/drawing/2014/main" id="{6599E858-95B9-7426-115D-BA8040758E2C}"/>
               </a:ext>
             </a:extLst>
           </p:cNvPr>
@@ -5561,7 +5623,7 @@
             <a:hlinkClick r:id="" action="ppaction://media"/>
             <a:extLst>
               <a:ext uri="{FF2B5EF4-FFF2-40B4-BE49-F238E27FC236}">
-                <a16:creationId xmlns:a16="http://schemas.microsoft.com/office/drawing/2014/main" id="{C6B1167C-0930-7E7B-166B-0D9F0A9B27A7}"/>
+                <a16:creationId xmlns:a16="http://schemas.microsoft.com/office/drawing/2014/main" id="{BF262257-1509-6409-A94E-6825879A2365}"/>
               </a:ext>
             </a:extLst>
           </p:cNvPr>
@@ -5596,7 +5658,7 @@
     </p:spTree>
     <p:extLst>
       <p:ext uri="{BB962C8B-B14F-4D97-AF65-F5344CB8AC3E}">
-        <p14:creationId xmlns:p14="http://schemas.microsoft.com/office/powerpoint/2010/main" val="1719096908"/>
+        <p14:creationId xmlns:p14="http://schemas.microsoft.com/office/powerpoint/2010/main" val="4156752057"/>
       </p:ext>
     </p:extLst>
   </p:cSld>

--- a/public/videos/repositories/akira-special/akira-special-tech-preview.pptx
+++ b/public/videos/repositories/akira-special/akira-special-tech-preview.pptx
@@ -134,7 +134,7 @@
           <p:cNvPr id="2" name="タイトル 1">
             <a:extLst>
               <a:ext uri="{FF2B5EF4-FFF2-40B4-BE49-F238E27FC236}">
-                <a16:creationId xmlns:a16="http://schemas.microsoft.com/office/drawing/2014/main" id="{7CB656CE-41A9-E5CD-1BFC-CCA97569712F}"/>
+                <a16:creationId xmlns:a16="http://schemas.microsoft.com/office/drawing/2014/main" id="{3FD20AF3-153E-5883-F3F5-9824F61B2BCD}"/>
               </a:ext>
             </a:extLst>
           </p:cNvPr>
@@ -171,7 +171,7 @@
           <p:cNvPr id="3" name="字幕 2">
             <a:extLst>
               <a:ext uri="{FF2B5EF4-FFF2-40B4-BE49-F238E27FC236}">
-                <a16:creationId xmlns:a16="http://schemas.microsoft.com/office/drawing/2014/main" id="{162079BB-9671-D69B-9BBF-187706BEE7FF}"/>
+                <a16:creationId xmlns:a16="http://schemas.microsoft.com/office/drawing/2014/main" id="{974E7FCB-8979-A58E-2BD7-C9D74BDBA77E}"/>
               </a:ext>
             </a:extLst>
           </p:cNvPr>
@@ -241,7 +241,7 @@
           <p:cNvPr id="4" name="日付プレースホルダー 3">
             <a:extLst>
               <a:ext uri="{FF2B5EF4-FFF2-40B4-BE49-F238E27FC236}">
-                <a16:creationId xmlns:a16="http://schemas.microsoft.com/office/drawing/2014/main" id="{E87BC618-286F-A02B-3D03-504EE1DFBDDD}"/>
+                <a16:creationId xmlns:a16="http://schemas.microsoft.com/office/drawing/2014/main" id="{99A25614-235B-5629-8248-3B89F2370967}"/>
               </a:ext>
             </a:extLst>
           </p:cNvPr>
@@ -257,7 +257,7 @@
           <a:bodyPr/>
           <a:lstStyle/>
           <a:p>
-            <a:fld id="{3B398E8E-E6C4-45B5-B268-4B5D9A817247}" type="datetimeFigureOut">
+            <a:fld id="{FD2A9F25-9FF8-4956-A5C2-83668A227A81}" type="datetimeFigureOut">
               <a:rPr kumimoji="1" lang="ja-JP" altLang="en-US" smtClean="0"/>
               <a:t>2026/7/30</a:t>
             </a:fld>
@@ -270,7 +270,7 @@
           <p:cNvPr id="5" name="フッター プレースホルダー 4">
             <a:extLst>
               <a:ext uri="{FF2B5EF4-FFF2-40B4-BE49-F238E27FC236}">
-                <a16:creationId xmlns:a16="http://schemas.microsoft.com/office/drawing/2014/main" id="{5BD5414B-1A41-B3C4-38E7-79D7D9DAC0A6}"/>
+                <a16:creationId xmlns:a16="http://schemas.microsoft.com/office/drawing/2014/main" id="{10B3DD61-9A90-EFB7-C3C8-E508B6AAC83E}"/>
               </a:ext>
             </a:extLst>
           </p:cNvPr>
@@ -295,7 +295,7 @@
           <p:cNvPr id="6" name="スライド番号プレースホルダー 5">
             <a:extLst>
               <a:ext uri="{FF2B5EF4-FFF2-40B4-BE49-F238E27FC236}">
-                <a16:creationId xmlns:a16="http://schemas.microsoft.com/office/drawing/2014/main" id="{63A8C257-AA4E-7188-F5DE-95D46862E4FA}"/>
+                <a16:creationId xmlns:a16="http://schemas.microsoft.com/office/drawing/2014/main" id="{EBD10CDF-4869-F625-8D73-2CEA8596A4F5}"/>
               </a:ext>
             </a:extLst>
           </p:cNvPr>
@@ -311,7 +311,7 @@
           <a:bodyPr/>
           <a:lstStyle/>
           <a:p>
-            <a:fld id="{6B13FFE0-42E4-41C4-B6AA-0447AC4C2603}" type="slidenum">
+            <a:fld id="{16DF39D3-CC7B-4462-83DC-337DA529A1DD}" type="slidenum">
               <a:rPr kumimoji="1" lang="ja-JP" altLang="en-US" smtClean="0"/>
               <a:t>‹#›</a:t>
             </a:fld>
@@ -322,7 +322,7 @@
     </p:spTree>
     <p:extLst>
       <p:ext uri="{BB962C8B-B14F-4D97-AF65-F5344CB8AC3E}">
-        <p14:creationId xmlns:p14="http://schemas.microsoft.com/office/powerpoint/2010/main" val="147050734"/>
+        <p14:creationId xmlns:p14="http://schemas.microsoft.com/office/powerpoint/2010/main" val="3808798524"/>
       </p:ext>
     </p:extLst>
   </p:cSld>
@@ -354,7 +354,7 @@
           <p:cNvPr id="2" name="タイトル 1">
             <a:extLst>
               <a:ext uri="{FF2B5EF4-FFF2-40B4-BE49-F238E27FC236}">
-                <a16:creationId xmlns:a16="http://schemas.microsoft.com/office/drawing/2014/main" id="{0410F013-313F-09AB-97DC-0D6298B8B346}"/>
+                <a16:creationId xmlns:a16="http://schemas.microsoft.com/office/drawing/2014/main" id="{7387C59D-EA6B-DAA1-A026-E734FA2111F6}"/>
               </a:ext>
             </a:extLst>
           </p:cNvPr>
@@ -382,7 +382,7 @@
           <p:cNvPr id="3" name="縦書きテキスト プレースホルダー 2">
             <a:extLst>
               <a:ext uri="{FF2B5EF4-FFF2-40B4-BE49-F238E27FC236}">
-                <a16:creationId xmlns:a16="http://schemas.microsoft.com/office/drawing/2014/main" id="{95B251BC-BDC9-3944-845B-076B173FDEE6}"/>
+                <a16:creationId xmlns:a16="http://schemas.microsoft.com/office/drawing/2014/main" id="{C0E689A4-0F42-0CF7-91A8-C14A065E3352}"/>
               </a:ext>
             </a:extLst>
           </p:cNvPr>
@@ -471,7 +471,7 @@
           <p:cNvPr id="4" name="日付プレースホルダー 3">
             <a:extLst>
               <a:ext uri="{FF2B5EF4-FFF2-40B4-BE49-F238E27FC236}">
-                <a16:creationId xmlns:a16="http://schemas.microsoft.com/office/drawing/2014/main" id="{DB6C96E6-9393-EFF6-66BF-7DFF6E2FAFD5}"/>
+                <a16:creationId xmlns:a16="http://schemas.microsoft.com/office/drawing/2014/main" id="{057E22D5-B67A-2226-D2CF-504BDFC1543E}"/>
               </a:ext>
             </a:extLst>
           </p:cNvPr>
@@ -487,7 +487,7 @@
           <a:bodyPr/>
           <a:lstStyle/>
           <a:p>
-            <a:fld id="{3B398E8E-E6C4-45B5-B268-4B5D9A817247}" type="datetimeFigureOut">
+            <a:fld id="{FD2A9F25-9FF8-4956-A5C2-83668A227A81}" type="datetimeFigureOut">
               <a:rPr kumimoji="1" lang="ja-JP" altLang="en-US" smtClean="0"/>
               <a:t>2026/7/30</a:t>
             </a:fld>
@@ -500,7 +500,7 @@
           <p:cNvPr id="5" name="フッター プレースホルダー 4">
             <a:extLst>
               <a:ext uri="{FF2B5EF4-FFF2-40B4-BE49-F238E27FC236}">
-                <a16:creationId xmlns:a16="http://schemas.microsoft.com/office/drawing/2014/main" id="{5BDEAD56-2511-7AC6-3A6B-5D83E4086D5E}"/>
+                <a16:creationId xmlns:a16="http://schemas.microsoft.com/office/drawing/2014/main" id="{AC9089D0-5B75-600E-CC35-29F83ED7BE6F}"/>
               </a:ext>
             </a:extLst>
           </p:cNvPr>
@@ -525,7 +525,7 @@
           <p:cNvPr id="6" name="スライド番号プレースホルダー 5">
             <a:extLst>
               <a:ext uri="{FF2B5EF4-FFF2-40B4-BE49-F238E27FC236}">
-                <a16:creationId xmlns:a16="http://schemas.microsoft.com/office/drawing/2014/main" id="{31C963F3-BE2A-C868-41C7-17FB25291B48}"/>
+                <a16:creationId xmlns:a16="http://schemas.microsoft.com/office/drawing/2014/main" id="{2130422A-E87B-E4BD-110C-56D896D56D2D}"/>
               </a:ext>
             </a:extLst>
           </p:cNvPr>
@@ -541,7 +541,7 @@
           <a:bodyPr/>
           <a:lstStyle/>
           <a:p>
-            <a:fld id="{6B13FFE0-42E4-41C4-B6AA-0447AC4C2603}" type="slidenum">
+            <a:fld id="{16DF39D3-CC7B-4462-83DC-337DA529A1DD}" type="slidenum">
               <a:rPr kumimoji="1" lang="ja-JP" altLang="en-US" smtClean="0"/>
               <a:t>‹#›</a:t>
             </a:fld>
@@ -552,7 +552,7 @@
     </p:spTree>
     <p:extLst>
       <p:ext uri="{BB962C8B-B14F-4D97-AF65-F5344CB8AC3E}">
-        <p14:creationId xmlns:p14="http://schemas.microsoft.com/office/powerpoint/2010/main" val="4205507031"/>
+        <p14:creationId xmlns:p14="http://schemas.microsoft.com/office/powerpoint/2010/main" val="173892261"/>
       </p:ext>
     </p:extLst>
   </p:cSld>
@@ -584,7 +584,7 @@
           <p:cNvPr id="2" name="縦書きタイトル 1">
             <a:extLst>
               <a:ext uri="{FF2B5EF4-FFF2-40B4-BE49-F238E27FC236}">
-                <a16:creationId xmlns:a16="http://schemas.microsoft.com/office/drawing/2014/main" id="{67548C36-5F89-74BB-B358-E03AE9C382E8}"/>
+                <a16:creationId xmlns:a16="http://schemas.microsoft.com/office/drawing/2014/main" id="{1220FFA1-F9D9-C98F-8434-2F0C5D9770EB}"/>
               </a:ext>
             </a:extLst>
           </p:cNvPr>
@@ -617,7 +617,7 @@
           <p:cNvPr id="3" name="縦書きテキスト プレースホルダー 2">
             <a:extLst>
               <a:ext uri="{FF2B5EF4-FFF2-40B4-BE49-F238E27FC236}">
-                <a16:creationId xmlns:a16="http://schemas.microsoft.com/office/drawing/2014/main" id="{385C6568-467A-0A9F-1BEA-48C4933CCD23}"/>
+                <a16:creationId xmlns:a16="http://schemas.microsoft.com/office/drawing/2014/main" id="{E576950A-AF38-257C-494E-E56F947FEF22}"/>
               </a:ext>
             </a:extLst>
           </p:cNvPr>
@@ -711,7 +711,7 @@
           <p:cNvPr id="4" name="日付プレースホルダー 3">
             <a:extLst>
               <a:ext uri="{FF2B5EF4-FFF2-40B4-BE49-F238E27FC236}">
-                <a16:creationId xmlns:a16="http://schemas.microsoft.com/office/drawing/2014/main" id="{7D122028-8C9F-6A37-4829-1FA50ECE38A1}"/>
+                <a16:creationId xmlns:a16="http://schemas.microsoft.com/office/drawing/2014/main" id="{7D4B9B7D-6A00-11D0-F49C-B8B3F85C2C20}"/>
               </a:ext>
             </a:extLst>
           </p:cNvPr>
@@ -727,7 +727,7 @@
           <a:bodyPr/>
           <a:lstStyle/>
           <a:p>
-            <a:fld id="{3B398E8E-E6C4-45B5-B268-4B5D9A817247}" type="datetimeFigureOut">
+            <a:fld id="{FD2A9F25-9FF8-4956-A5C2-83668A227A81}" type="datetimeFigureOut">
               <a:rPr kumimoji="1" lang="ja-JP" altLang="en-US" smtClean="0"/>
               <a:t>2026/7/30</a:t>
             </a:fld>
@@ -740,7 +740,7 @@
           <p:cNvPr id="5" name="フッター プレースホルダー 4">
             <a:extLst>
               <a:ext uri="{FF2B5EF4-FFF2-40B4-BE49-F238E27FC236}">
-                <a16:creationId xmlns:a16="http://schemas.microsoft.com/office/drawing/2014/main" id="{DA15DD08-89A1-6990-7952-CAE396B1DB7D}"/>
+                <a16:creationId xmlns:a16="http://schemas.microsoft.com/office/drawing/2014/main" id="{FCF279C7-1731-05CE-B364-EB6E67C9596C}"/>
               </a:ext>
             </a:extLst>
           </p:cNvPr>
@@ -765,7 +765,7 @@
           <p:cNvPr id="6" name="スライド番号プレースホルダー 5">
             <a:extLst>
               <a:ext uri="{FF2B5EF4-FFF2-40B4-BE49-F238E27FC236}">
-                <a16:creationId xmlns:a16="http://schemas.microsoft.com/office/drawing/2014/main" id="{BF592F12-A227-63CE-54C8-916AB1A456FC}"/>
+                <a16:creationId xmlns:a16="http://schemas.microsoft.com/office/drawing/2014/main" id="{9A40E998-5A68-8BCC-8D06-AB894B8D61C7}"/>
               </a:ext>
             </a:extLst>
           </p:cNvPr>
@@ -781,7 +781,7 @@
           <a:bodyPr/>
           <a:lstStyle/>
           <a:p>
-            <a:fld id="{6B13FFE0-42E4-41C4-B6AA-0447AC4C2603}" type="slidenum">
+            <a:fld id="{16DF39D3-CC7B-4462-83DC-337DA529A1DD}" type="slidenum">
               <a:rPr kumimoji="1" lang="ja-JP" altLang="en-US" smtClean="0"/>
               <a:t>‹#›</a:t>
             </a:fld>
@@ -792,7 +792,7 @@
     </p:spTree>
     <p:extLst>
       <p:ext uri="{BB962C8B-B14F-4D97-AF65-F5344CB8AC3E}">
-        <p14:creationId xmlns:p14="http://schemas.microsoft.com/office/powerpoint/2010/main" val="1109889167"/>
+        <p14:creationId xmlns:p14="http://schemas.microsoft.com/office/powerpoint/2010/main" val="4015375982"/>
       </p:ext>
     </p:extLst>
   </p:cSld>
@@ -824,7 +824,7 @@
           <p:cNvPr id="2" name="タイトル 1">
             <a:extLst>
               <a:ext uri="{FF2B5EF4-FFF2-40B4-BE49-F238E27FC236}">
-                <a16:creationId xmlns:a16="http://schemas.microsoft.com/office/drawing/2014/main" id="{A8FD83AD-8517-EEB7-9EAB-89ED764DBAB6}"/>
+                <a16:creationId xmlns:a16="http://schemas.microsoft.com/office/drawing/2014/main" id="{E51E47D5-E6F8-7E00-E1E3-4646C7767894}"/>
               </a:ext>
             </a:extLst>
           </p:cNvPr>
@@ -852,7 +852,7 @@
           <p:cNvPr id="3" name="コンテンツ プレースホルダー 2">
             <a:extLst>
               <a:ext uri="{FF2B5EF4-FFF2-40B4-BE49-F238E27FC236}">
-                <a16:creationId xmlns:a16="http://schemas.microsoft.com/office/drawing/2014/main" id="{14FB61A7-7F16-33ED-D814-1998E8F986C6}"/>
+                <a16:creationId xmlns:a16="http://schemas.microsoft.com/office/drawing/2014/main" id="{7DB83DF6-C98B-F9A8-531E-3B4E29210847}"/>
               </a:ext>
             </a:extLst>
           </p:cNvPr>
@@ -941,7 +941,7 @@
           <p:cNvPr id="4" name="日付プレースホルダー 3">
             <a:extLst>
               <a:ext uri="{FF2B5EF4-FFF2-40B4-BE49-F238E27FC236}">
-                <a16:creationId xmlns:a16="http://schemas.microsoft.com/office/drawing/2014/main" id="{D5AAC4AC-5DFF-D8DF-F421-7725DA72673C}"/>
+                <a16:creationId xmlns:a16="http://schemas.microsoft.com/office/drawing/2014/main" id="{AEA5B273-21C9-2E3D-8871-09714C364D1B}"/>
               </a:ext>
             </a:extLst>
           </p:cNvPr>
@@ -957,7 +957,7 @@
           <a:bodyPr/>
           <a:lstStyle/>
           <a:p>
-            <a:fld id="{3B398E8E-E6C4-45B5-B268-4B5D9A817247}" type="datetimeFigureOut">
+            <a:fld id="{FD2A9F25-9FF8-4956-A5C2-83668A227A81}" type="datetimeFigureOut">
               <a:rPr kumimoji="1" lang="ja-JP" altLang="en-US" smtClean="0"/>
               <a:t>2026/7/30</a:t>
             </a:fld>
@@ -970,7 +970,7 @@
           <p:cNvPr id="5" name="フッター プレースホルダー 4">
             <a:extLst>
               <a:ext uri="{FF2B5EF4-FFF2-40B4-BE49-F238E27FC236}">
-                <a16:creationId xmlns:a16="http://schemas.microsoft.com/office/drawing/2014/main" id="{C9D0F9EF-FCE0-C6A4-A5BC-831459D6F325}"/>
+                <a16:creationId xmlns:a16="http://schemas.microsoft.com/office/drawing/2014/main" id="{95C787FE-A2E5-9D74-FAD9-9A7FD2EC13DD}"/>
               </a:ext>
             </a:extLst>
           </p:cNvPr>
@@ -995,7 +995,7 @@
           <p:cNvPr id="6" name="スライド番号プレースホルダー 5">
             <a:extLst>
               <a:ext uri="{FF2B5EF4-FFF2-40B4-BE49-F238E27FC236}">
-                <a16:creationId xmlns:a16="http://schemas.microsoft.com/office/drawing/2014/main" id="{DA6B0243-EFB0-868D-9499-A9BE595A7FB6}"/>
+                <a16:creationId xmlns:a16="http://schemas.microsoft.com/office/drawing/2014/main" id="{67838662-D287-2DFF-108D-D5FAB2941DF2}"/>
               </a:ext>
             </a:extLst>
           </p:cNvPr>
@@ -1011,7 +1011,7 @@
           <a:bodyPr/>
           <a:lstStyle/>
           <a:p>
-            <a:fld id="{6B13FFE0-42E4-41C4-B6AA-0447AC4C2603}" type="slidenum">
+            <a:fld id="{16DF39D3-CC7B-4462-83DC-337DA529A1DD}" type="slidenum">
               <a:rPr kumimoji="1" lang="ja-JP" altLang="en-US" smtClean="0"/>
               <a:t>‹#›</a:t>
             </a:fld>
@@ -1022,7 +1022,7 @@
     </p:spTree>
     <p:extLst>
       <p:ext uri="{BB962C8B-B14F-4D97-AF65-F5344CB8AC3E}">
-        <p14:creationId xmlns:p14="http://schemas.microsoft.com/office/powerpoint/2010/main" val="2055852446"/>
+        <p14:creationId xmlns:p14="http://schemas.microsoft.com/office/powerpoint/2010/main" val="1506821809"/>
       </p:ext>
     </p:extLst>
   </p:cSld>
@@ -1054,7 +1054,7 @@
           <p:cNvPr id="2" name="タイトル 1">
             <a:extLst>
               <a:ext uri="{FF2B5EF4-FFF2-40B4-BE49-F238E27FC236}">
-                <a16:creationId xmlns:a16="http://schemas.microsoft.com/office/drawing/2014/main" id="{26112352-7D9D-59D9-8B60-F37671025DE2}"/>
+                <a16:creationId xmlns:a16="http://schemas.microsoft.com/office/drawing/2014/main" id="{0005C2C7-391A-747B-92C8-BE7DE02FC542}"/>
               </a:ext>
             </a:extLst>
           </p:cNvPr>
@@ -1091,7 +1091,7 @@
           <p:cNvPr id="3" name="テキスト プレースホルダー 2">
             <a:extLst>
               <a:ext uri="{FF2B5EF4-FFF2-40B4-BE49-F238E27FC236}">
-                <a16:creationId xmlns:a16="http://schemas.microsoft.com/office/drawing/2014/main" id="{88CC26D4-62D4-564B-2E9C-13268E798409}"/>
+                <a16:creationId xmlns:a16="http://schemas.microsoft.com/office/drawing/2014/main" id="{2CCC723D-5198-4A22-716E-D7DC240161E8}"/>
               </a:ext>
             </a:extLst>
           </p:cNvPr>
@@ -1216,7 +1216,7 @@
           <p:cNvPr id="4" name="日付プレースホルダー 3">
             <a:extLst>
               <a:ext uri="{FF2B5EF4-FFF2-40B4-BE49-F238E27FC236}">
-                <a16:creationId xmlns:a16="http://schemas.microsoft.com/office/drawing/2014/main" id="{5BD2901B-CDFC-0731-0D88-5BD84E5C1DAC}"/>
+                <a16:creationId xmlns:a16="http://schemas.microsoft.com/office/drawing/2014/main" id="{7EA0A234-018C-294A-1688-1A70907D916B}"/>
               </a:ext>
             </a:extLst>
           </p:cNvPr>
@@ -1232,7 +1232,7 @@
           <a:bodyPr/>
           <a:lstStyle/>
           <a:p>
-            <a:fld id="{3B398E8E-E6C4-45B5-B268-4B5D9A817247}" type="datetimeFigureOut">
+            <a:fld id="{FD2A9F25-9FF8-4956-A5C2-83668A227A81}" type="datetimeFigureOut">
               <a:rPr kumimoji="1" lang="ja-JP" altLang="en-US" smtClean="0"/>
               <a:t>2026/7/30</a:t>
             </a:fld>
@@ -1245,7 +1245,7 @@
           <p:cNvPr id="5" name="フッター プレースホルダー 4">
             <a:extLst>
               <a:ext uri="{FF2B5EF4-FFF2-40B4-BE49-F238E27FC236}">
-                <a16:creationId xmlns:a16="http://schemas.microsoft.com/office/drawing/2014/main" id="{D539A3BC-F562-C3E1-8AB0-40AE09DBAD9B}"/>
+                <a16:creationId xmlns:a16="http://schemas.microsoft.com/office/drawing/2014/main" id="{68034D4F-06FF-87B4-6369-2E3A01F3F00B}"/>
               </a:ext>
             </a:extLst>
           </p:cNvPr>
@@ -1270,7 +1270,7 @@
           <p:cNvPr id="6" name="スライド番号プレースホルダー 5">
             <a:extLst>
               <a:ext uri="{FF2B5EF4-FFF2-40B4-BE49-F238E27FC236}">
-                <a16:creationId xmlns:a16="http://schemas.microsoft.com/office/drawing/2014/main" id="{1F960823-1041-43BF-A5FB-B72260738724}"/>
+                <a16:creationId xmlns:a16="http://schemas.microsoft.com/office/drawing/2014/main" id="{DF755961-57B4-B231-D88C-D2ED7F679C6F}"/>
               </a:ext>
             </a:extLst>
           </p:cNvPr>
@@ -1286,7 +1286,7 @@
           <a:bodyPr/>
           <a:lstStyle/>
           <a:p>
-            <a:fld id="{6B13FFE0-42E4-41C4-B6AA-0447AC4C2603}" type="slidenum">
+            <a:fld id="{16DF39D3-CC7B-4462-83DC-337DA529A1DD}" type="slidenum">
               <a:rPr kumimoji="1" lang="ja-JP" altLang="en-US" smtClean="0"/>
               <a:t>‹#›</a:t>
             </a:fld>
@@ -1297,7 +1297,7 @@
     </p:spTree>
     <p:extLst>
       <p:ext uri="{BB962C8B-B14F-4D97-AF65-F5344CB8AC3E}">
-        <p14:creationId xmlns:p14="http://schemas.microsoft.com/office/powerpoint/2010/main" val="3883800406"/>
+        <p14:creationId xmlns:p14="http://schemas.microsoft.com/office/powerpoint/2010/main" val="2223304283"/>
       </p:ext>
     </p:extLst>
   </p:cSld>
@@ -1329,7 +1329,7 @@
           <p:cNvPr id="2" name="タイトル 1">
             <a:extLst>
               <a:ext uri="{FF2B5EF4-FFF2-40B4-BE49-F238E27FC236}">
-                <a16:creationId xmlns:a16="http://schemas.microsoft.com/office/drawing/2014/main" id="{303E3E5A-4075-BB4B-2010-7F31E8977A55}"/>
+                <a16:creationId xmlns:a16="http://schemas.microsoft.com/office/drawing/2014/main" id="{1522C114-F464-ED71-183C-B4ECE895679C}"/>
               </a:ext>
             </a:extLst>
           </p:cNvPr>
@@ -1357,7 +1357,7 @@
           <p:cNvPr id="3" name="コンテンツ プレースホルダー 2">
             <a:extLst>
               <a:ext uri="{FF2B5EF4-FFF2-40B4-BE49-F238E27FC236}">
-                <a16:creationId xmlns:a16="http://schemas.microsoft.com/office/drawing/2014/main" id="{6BDFB532-0349-ED30-AC3D-E4D2FB676F22}"/>
+                <a16:creationId xmlns:a16="http://schemas.microsoft.com/office/drawing/2014/main" id="{EBED6F32-786C-8769-1A8E-119DA6DD9C3C}"/>
               </a:ext>
             </a:extLst>
           </p:cNvPr>
@@ -1451,7 +1451,7 @@
           <p:cNvPr id="4" name="コンテンツ プレースホルダー 3">
             <a:extLst>
               <a:ext uri="{FF2B5EF4-FFF2-40B4-BE49-F238E27FC236}">
-                <a16:creationId xmlns:a16="http://schemas.microsoft.com/office/drawing/2014/main" id="{441D9EC7-E1F8-E1A5-F0B7-95BE602A9AFD}"/>
+                <a16:creationId xmlns:a16="http://schemas.microsoft.com/office/drawing/2014/main" id="{CDF8C74F-5C92-245A-4E9C-AD517C9CCB34}"/>
               </a:ext>
             </a:extLst>
           </p:cNvPr>
@@ -1545,7 +1545,7 @@
           <p:cNvPr id="5" name="日付プレースホルダー 4">
             <a:extLst>
               <a:ext uri="{FF2B5EF4-FFF2-40B4-BE49-F238E27FC236}">
-                <a16:creationId xmlns:a16="http://schemas.microsoft.com/office/drawing/2014/main" id="{DBB6BD6A-2156-103D-4D6C-294986D52784}"/>
+                <a16:creationId xmlns:a16="http://schemas.microsoft.com/office/drawing/2014/main" id="{13D53D6F-C912-0130-3FB3-A1D428F59B47}"/>
               </a:ext>
             </a:extLst>
           </p:cNvPr>
@@ -1561,7 +1561,7 @@
           <a:bodyPr/>
           <a:lstStyle/>
           <a:p>
-            <a:fld id="{3B398E8E-E6C4-45B5-B268-4B5D9A817247}" type="datetimeFigureOut">
+            <a:fld id="{FD2A9F25-9FF8-4956-A5C2-83668A227A81}" type="datetimeFigureOut">
               <a:rPr kumimoji="1" lang="ja-JP" altLang="en-US" smtClean="0"/>
               <a:t>2026/7/30</a:t>
             </a:fld>
@@ -1574,7 +1574,7 @@
           <p:cNvPr id="6" name="フッター プレースホルダー 5">
             <a:extLst>
               <a:ext uri="{FF2B5EF4-FFF2-40B4-BE49-F238E27FC236}">
-                <a16:creationId xmlns:a16="http://schemas.microsoft.com/office/drawing/2014/main" id="{7EA3969E-A7E3-1154-C013-A71FEB348BF3}"/>
+                <a16:creationId xmlns:a16="http://schemas.microsoft.com/office/drawing/2014/main" id="{D69E93D1-E177-AE46-E989-F0D085BF9FD2}"/>
               </a:ext>
             </a:extLst>
           </p:cNvPr>
@@ -1599,7 +1599,7 @@
           <p:cNvPr id="7" name="スライド番号プレースホルダー 6">
             <a:extLst>
               <a:ext uri="{FF2B5EF4-FFF2-40B4-BE49-F238E27FC236}">
-                <a16:creationId xmlns:a16="http://schemas.microsoft.com/office/drawing/2014/main" id="{40D3419B-CE49-6921-C82C-555890B35BCB}"/>
+                <a16:creationId xmlns:a16="http://schemas.microsoft.com/office/drawing/2014/main" id="{BE65692F-0AD6-1575-7534-824E73F57292}"/>
               </a:ext>
             </a:extLst>
           </p:cNvPr>
@@ -1615,7 +1615,7 @@
           <a:bodyPr/>
           <a:lstStyle/>
           <a:p>
-            <a:fld id="{6B13FFE0-42E4-41C4-B6AA-0447AC4C2603}" type="slidenum">
+            <a:fld id="{16DF39D3-CC7B-4462-83DC-337DA529A1DD}" type="slidenum">
               <a:rPr kumimoji="1" lang="ja-JP" altLang="en-US" smtClean="0"/>
               <a:t>‹#›</a:t>
             </a:fld>
@@ -1626,7 +1626,7 @@
     </p:spTree>
     <p:extLst>
       <p:ext uri="{BB962C8B-B14F-4D97-AF65-F5344CB8AC3E}">
-        <p14:creationId xmlns:p14="http://schemas.microsoft.com/office/powerpoint/2010/main" val="3556387400"/>
+        <p14:creationId xmlns:p14="http://schemas.microsoft.com/office/powerpoint/2010/main" val="2157973366"/>
       </p:ext>
     </p:extLst>
   </p:cSld>
@@ -1658,7 +1658,7 @@
           <p:cNvPr id="2" name="タイトル 1">
             <a:extLst>
               <a:ext uri="{FF2B5EF4-FFF2-40B4-BE49-F238E27FC236}">
-                <a16:creationId xmlns:a16="http://schemas.microsoft.com/office/drawing/2014/main" id="{00159D1E-AC09-644A-5BAF-DBC958797029}"/>
+                <a16:creationId xmlns:a16="http://schemas.microsoft.com/office/drawing/2014/main" id="{A086106D-7EAA-6F40-0A74-70DB8EA80B91}"/>
               </a:ext>
             </a:extLst>
           </p:cNvPr>
@@ -1691,7 +1691,7 @@
           <p:cNvPr id="3" name="テキスト プレースホルダー 2">
             <a:extLst>
               <a:ext uri="{FF2B5EF4-FFF2-40B4-BE49-F238E27FC236}">
-                <a16:creationId xmlns:a16="http://schemas.microsoft.com/office/drawing/2014/main" id="{4172B0D1-4ED3-8F73-EB9E-FBB6D0AE5CE8}"/>
+                <a16:creationId xmlns:a16="http://schemas.microsoft.com/office/drawing/2014/main" id="{105C849D-BCD2-C9EF-58AF-266858E326BB}"/>
               </a:ext>
             </a:extLst>
           </p:cNvPr>
@@ -1762,7 +1762,7 @@
           <p:cNvPr id="4" name="コンテンツ プレースホルダー 3">
             <a:extLst>
               <a:ext uri="{FF2B5EF4-FFF2-40B4-BE49-F238E27FC236}">
-                <a16:creationId xmlns:a16="http://schemas.microsoft.com/office/drawing/2014/main" id="{69997570-B299-1FAB-B44E-E2F650C45E22}"/>
+                <a16:creationId xmlns:a16="http://schemas.microsoft.com/office/drawing/2014/main" id="{8C725D34-3A5D-7E18-EDAE-D66B7C18866C}"/>
               </a:ext>
             </a:extLst>
           </p:cNvPr>
@@ -1856,7 +1856,7 @@
           <p:cNvPr id="5" name="テキスト プレースホルダー 4">
             <a:extLst>
               <a:ext uri="{FF2B5EF4-FFF2-40B4-BE49-F238E27FC236}">
-                <a16:creationId xmlns:a16="http://schemas.microsoft.com/office/drawing/2014/main" id="{D135FFD2-4BF5-C7C6-F8C3-4FF2AD4A4007}"/>
+                <a16:creationId xmlns:a16="http://schemas.microsoft.com/office/drawing/2014/main" id="{8F1CB37E-97AB-5ED3-4E5C-D6B2DD7A5571}"/>
               </a:ext>
             </a:extLst>
           </p:cNvPr>
@@ -1927,7 +1927,7 @@
           <p:cNvPr id="6" name="コンテンツ プレースホルダー 5">
             <a:extLst>
               <a:ext uri="{FF2B5EF4-FFF2-40B4-BE49-F238E27FC236}">
-                <a16:creationId xmlns:a16="http://schemas.microsoft.com/office/drawing/2014/main" id="{027FC2A2-0884-7263-BA89-539A564E8FEE}"/>
+                <a16:creationId xmlns:a16="http://schemas.microsoft.com/office/drawing/2014/main" id="{CA5CB7AD-28B7-A5F5-3DFE-47897EFEDD11}"/>
               </a:ext>
             </a:extLst>
           </p:cNvPr>
@@ -2021,7 +2021,7 @@
           <p:cNvPr id="7" name="日付プレースホルダー 6">
             <a:extLst>
               <a:ext uri="{FF2B5EF4-FFF2-40B4-BE49-F238E27FC236}">
-                <a16:creationId xmlns:a16="http://schemas.microsoft.com/office/drawing/2014/main" id="{54FA2DB7-7480-F787-926B-B8AD8280AC53}"/>
+                <a16:creationId xmlns:a16="http://schemas.microsoft.com/office/drawing/2014/main" id="{B7854003-EF64-23E5-4FDF-C2FAE84BB470}"/>
               </a:ext>
             </a:extLst>
           </p:cNvPr>
@@ -2037,7 +2037,7 @@
           <a:bodyPr/>
           <a:lstStyle/>
           <a:p>
-            <a:fld id="{3B398E8E-E6C4-45B5-B268-4B5D9A817247}" type="datetimeFigureOut">
+            <a:fld id="{FD2A9F25-9FF8-4956-A5C2-83668A227A81}" type="datetimeFigureOut">
               <a:rPr kumimoji="1" lang="ja-JP" altLang="en-US" smtClean="0"/>
               <a:t>2026/7/30</a:t>
             </a:fld>
@@ -2050,7 +2050,7 @@
           <p:cNvPr id="8" name="フッター プレースホルダー 7">
             <a:extLst>
               <a:ext uri="{FF2B5EF4-FFF2-40B4-BE49-F238E27FC236}">
-                <a16:creationId xmlns:a16="http://schemas.microsoft.com/office/drawing/2014/main" id="{CE3050ED-7568-B1CC-1EE4-E984354856F8}"/>
+                <a16:creationId xmlns:a16="http://schemas.microsoft.com/office/drawing/2014/main" id="{7AFADA42-785E-EDF8-8FAA-7A57F983262C}"/>
               </a:ext>
             </a:extLst>
           </p:cNvPr>
@@ -2075,7 +2075,7 @@
           <p:cNvPr id="9" name="スライド番号プレースホルダー 8">
             <a:extLst>
               <a:ext uri="{FF2B5EF4-FFF2-40B4-BE49-F238E27FC236}">
-                <a16:creationId xmlns:a16="http://schemas.microsoft.com/office/drawing/2014/main" id="{470D0AFE-5609-88DB-F4F1-AD8BD8B81530}"/>
+                <a16:creationId xmlns:a16="http://schemas.microsoft.com/office/drawing/2014/main" id="{236B0BA7-C224-9DDF-2BAD-62796CB9D391}"/>
               </a:ext>
             </a:extLst>
           </p:cNvPr>
@@ -2091,7 +2091,7 @@
           <a:bodyPr/>
           <a:lstStyle/>
           <a:p>
-            <a:fld id="{6B13FFE0-42E4-41C4-B6AA-0447AC4C2603}" type="slidenum">
+            <a:fld id="{16DF39D3-CC7B-4462-83DC-337DA529A1DD}" type="slidenum">
               <a:rPr kumimoji="1" lang="ja-JP" altLang="en-US" smtClean="0"/>
               <a:t>‹#›</a:t>
             </a:fld>
@@ -2102,7 +2102,7 @@
     </p:spTree>
     <p:extLst>
       <p:ext uri="{BB962C8B-B14F-4D97-AF65-F5344CB8AC3E}">
-        <p14:creationId xmlns:p14="http://schemas.microsoft.com/office/powerpoint/2010/main" val="3261203264"/>
+        <p14:creationId xmlns:p14="http://schemas.microsoft.com/office/powerpoint/2010/main" val="2714546912"/>
       </p:ext>
     </p:extLst>
   </p:cSld>
@@ -2134,7 +2134,7 @@
           <p:cNvPr id="2" name="タイトル 1">
             <a:extLst>
               <a:ext uri="{FF2B5EF4-FFF2-40B4-BE49-F238E27FC236}">
-                <a16:creationId xmlns:a16="http://schemas.microsoft.com/office/drawing/2014/main" id="{61D15337-ED22-4CEA-258D-5EA706098A22}"/>
+                <a16:creationId xmlns:a16="http://schemas.microsoft.com/office/drawing/2014/main" id="{C9B5F323-28C3-9520-83DB-EC2A9D1C8FBA}"/>
               </a:ext>
             </a:extLst>
           </p:cNvPr>
@@ -2162,7 +2162,7 @@
           <p:cNvPr id="3" name="日付プレースホルダー 2">
             <a:extLst>
               <a:ext uri="{FF2B5EF4-FFF2-40B4-BE49-F238E27FC236}">
-                <a16:creationId xmlns:a16="http://schemas.microsoft.com/office/drawing/2014/main" id="{348F60F9-853F-B81D-26B3-BE9E4099489C}"/>
+                <a16:creationId xmlns:a16="http://schemas.microsoft.com/office/drawing/2014/main" id="{7942686D-9A17-807D-EA0B-7F361F5807EE}"/>
               </a:ext>
             </a:extLst>
           </p:cNvPr>
@@ -2178,7 +2178,7 @@
           <a:bodyPr/>
           <a:lstStyle/>
           <a:p>
-            <a:fld id="{3B398E8E-E6C4-45B5-B268-4B5D9A817247}" type="datetimeFigureOut">
+            <a:fld id="{FD2A9F25-9FF8-4956-A5C2-83668A227A81}" type="datetimeFigureOut">
               <a:rPr kumimoji="1" lang="ja-JP" altLang="en-US" smtClean="0"/>
               <a:t>2026/7/30</a:t>
             </a:fld>
@@ -2191,7 +2191,7 @@
           <p:cNvPr id="4" name="フッター プレースホルダー 3">
             <a:extLst>
               <a:ext uri="{FF2B5EF4-FFF2-40B4-BE49-F238E27FC236}">
-                <a16:creationId xmlns:a16="http://schemas.microsoft.com/office/drawing/2014/main" id="{3E40A11B-E48F-16FB-5182-CC55ED838DD2}"/>
+                <a16:creationId xmlns:a16="http://schemas.microsoft.com/office/drawing/2014/main" id="{BC73133B-5D06-EE34-DCA8-5C8986BA2852}"/>
               </a:ext>
             </a:extLst>
           </p:cNvPr>
@@ -2216,7 +2216,7 @@
           <p:cNvPr id="5" name="スライド番号プレースホルダー 4">
             <a:extLst>
               <a:ext uri="{FF2B5EF4-FFF2-40B4-BE49-F238E27FC236}">
-                <a16:creationId xmlns:a16="http://schemas.microsoft.com/office/drawing/2014/main" id="{448C3B8C-E79A-4470-36F5-67808C7E4DB1}"/>
+                <a16:creationId xmlns:a16="http://schemas.microsoft.com/office/drawing/2014/main" id="{1E024382-050B-901F-D2AA-01868E78C8B6}"/>
               </a:ext>
             </a:extLst>
           </p:cNvPr>
@@ -2232,7 +2232,7 @@
           <a:bodyPr/>
           <a:lstStyle/>
           <a:p>
-            <a:fld id="{6B13FFE0-42E4-41C4-B6AA-0447AC4C2603}" type="slidenum">
+            <a:fld id="{16DF39D3-CC7B-4462-83DC-337DA529A1DD}" type="slidenum">
               <a:rPr kumimoji="1" lang="ja-JP" altLang="en-US" smtClean="0"/>
               <a:t>‹#›</a:t>
             </a:fld>
@@ -2243,7 +2243,7 @@
     </p:spTree>
     <p:extLst>
       <p:ext uri="{BB962C8B-B14F-4D97-AF65-F5344CB8AC3E}">
-        <p14:creationId xmlns:p14="http://schemas.microsoft.com/office/powerpoint/2010/main" val="929346081"/>
+        <p14:creationId xmlns:p14="http://schemas.microsoft.com/office/powerpoint/2010/main" val="996390083"/>
       </p:ext>
     </p:extLst>
   </p:cSld>
@@ -2275,7 +2275,7 @@
           <p:cNvPr id="2" name="日付プレースホルダー 1">
             <a:extLst>
               <a:ext uri="{FF2B5EF4-FFF2-40B4-BE49-F238E27FC236}">
-                <a16:creationId xmlns:a16="http://schemas.microsoft.com/office/drawing/2014/main" id="{97642134-3BDC-ED53-80DC-D9D36C0B230F}"/>
+                <a16:creationId xmlns:a16="http://schemas.microsoft.com/office/drawing/2014/main" id="{D81A8D20-355F-2063-C5A8-77C41425DE32}"/>
               </a:ext>
             </a:extLst>
           </p:cNvPr>
@@ -2291,7 +2291,7 @@
           <a:bodyPr/>
           <a:lstStyle/>
           <a:p>
-            <a:fld id="{3B398E8E-E6C4-45B5-B268-4B5D9A817247}" type="datetimeFigureOut">
+            <a:fld id="{FD2A9F25-9FF8-4956-A5C2-83668A227A81}" type="datetimeFigureOut">
               <a:rPr kumimoji="1" lang="ja-JP" altLang="en-US" smtClean="0"/>
               <a:t>2026/7/30</a:t>
             </a:fld>
@@ -2304,7 +2304,7 @@
           <p:cNvPr id="3" name="フッター プレースホルダー 2">
             <a:extLst>
               <a:ext uri="{FF2B5EF4-FFF2-40B4-BE49-F238E27FC236}">
-                <a16:creationId xmlns:a16="http://schemas.microsoft.com/office/drawing/2014/main" id="{F72974AE-E3D8-63CB-3AFC-B38ACC68DE10}"/>
+                <a16:creationId xmlns:a16="http://schemas.microsoft.com/office/drawing/2014/main" id="{35786FB3-92A8-6C6F-B581-239C8D8C909E}"/>
               </a:ext>
             </a:extLst>
           </p:cNvPr>
@@ -2329,7 +2329,7 @@
           <p:cNvPr id="4" name="スライド番号プレースホルダー 3">
             <a:extLst>
               <a:ext uri="{FF2B5EF4-FFF2-40B4-BE49-F238E27FC236}">
-                <a16:creationId xmlns:a16="http://schemas.microsoft.com/office/drawing/2014/main" id="{53F55AA6-02D3-E2BA-1C3F-9568F8A3043E}"/>
+                <a16:creationId xmlns:a16="http://schemas.microsoft.com/office/drawing/2014/main" id="{D600EFA6-C4CF-2B54-535B-C3A40D3B5439}"/>
               </a:ext>
             </a:extLst>
           </p:cNvPr>
@@ -2345,7 +2345,7 @@
           <a:bodyPr/>
           <a:lstStyle/>
           <a:p>
-            <a:fld id="{6B13FFE0-42E4-41C4-B6AA-0447AC4C2603}" type="slidenum">
+            <a:fld id="{16DF39D3-CC7B-4462-83DC-337DA529A1DD}" type="slidenum">
               <a:rPr kumimoji="1" lang="ja-JP" altLang="en-US" smtClean="0"/>
               <a:t>‹#›</a:t>
             </a:fld>
@@ -2356,7 +2356,7 @@
     </p:spTree>
     <p:extLst>
       <p:ext uri="{BB962C8B-B14F-4D97-AF65-F5344CB8AC3E}">
-        <p14:creationId xmlns:p14="http://schemas.microsoft.com/office/powerpoint/2010/main" val="245725281"/>
+        <p14:creationId xmlns:p14="http://schemas.microsoft.com/office/powerpoint/2010/main" val="4134374290"/>
       </p:ext>
     </p:extLst>
   </p:cSld>
@@ -2388,7 +2388,7 @@
           <p:cNvPr id="2" name="タイトル 1">
             <a:extLst>
               <a:ext uri="{FF2B5EF4-FFF2-40B4-BE49-F238E27FC236}">
-                <a16:creationId xmlns:a16="http://schemas.microsoft.com/office/drawing/2014/main" id="{65340D9F-CF29-03E1-22C1-FE00175BD260}"/>
+                <a16:creationId xmlns:a16="http://schemas.microsoft.com/office/drawing/2014/main" id="{6194B2BA-5F45-4149-0E01-3087AF1EB322}"/>
               </a:ext>
             </a:extLst>
           </p:cNvPr>
@@ -2425,7 +2425,7 @@
           <p:cNvPr id="3" name="コンテンツ プレースホルダー 2">
             <a:extLst>
               <a:ext uri="{FF2B5EF4-FFF2-40B4-BE49-F238E27FC236}">
-                <a16:creationId xmlns:a16="http://schemas.microsoft.com/office/drawing/2014/main" id="{B06E1FBC-3F32-0F67-410A-26188EDB3A47}"/>
+                <a16:creationId xmlns:a16="http://schemas.microsoft.com/office/drawing/2014/main" id="{FA1A0114-029B-8E43-6876-683DACE503A6}"/>
               </a:ext>
             </a:extLst>
           </p:cNvPr>
@@ -2547,7 +2547,7 @@
           <p:cNvPr id="4" name="テキスト プレースホルダー 3">
             <a:extLst>
               <a:ext uri="{FF2B5EF4-FFF2-40B4-BE49-F238E27FC236}">
-                <a16:creationId xmlns:a16="http://schemas.microsoft.com/office/drawing/2014/main" id="{E86E25B8-92B7-62FD-0861-5D0BC45014F7}"/>
+                <a16:creationId xmlns:a16="http://schemas.microsoft.com/office/drawing/2014/main" id="{A70B9A3C-F54F-9FFF-DE4C-28E1908DA280}"/>
               </a:ext>
             </a:extLst>
           </p:cNvPr>
@@ -2618,7 +2618,7 @@
           <p:cNvPr id="5" name="日付プレースホルダー 4">
             <a:extLst>
               <a:ext uri="{FF2B5EF4-FFF2-40B4-BE49-F238E27FC236}">
-                <a16:creationId xmlns:a16="http://schemas.microsoft.com/office/drawing/2014/main" id="{9C519DEB-9A85-E5DD-4E8E-0FACD0287B5C}"/>
+                <a16:creationId xmlns:a16="http://schemas.microsoft.com/office/drawing/2014/main" id="{2A4D9263-C59D-276B-155B-EFFB32BDB138}"/>
               </a:ext>
             </a:extLst>
           </p:cNvPr>
@@ -2634,7 +2634,7 @@
           <a:bodyPr/>
           <a:lstStyle/>
           <a:p>
-            <a:fld id="{3B398E8E-E6C4-45B5-B268-4B5D9A817247}" type="datetimeFigureOut">
+            <a:fld id="{FD2A9F25-9FF8-4956-A5C2-83668A227A81}" type="datetimeFigureOut">
               <a:rPr kumimoji="1" lang="ja-JP" altLang="en-US" smtClean="0"/>
               <a:t>2026/7/30</a:t>
             </a:fld>
@@ -2647,7 +2647,7 @@
           <p:cNvPr id="6" name="フッター プレースホルダー 5">
             <a:extLst>
               <a:ext uri="{FF2B5EF4-FFF2-40B4-BE49-F238E27FC236}">
-                <a16:creationId xmlns:a16="http://schemas.microsoft.com/office/drawing/2014/main" id="{629759B1-32F2-B488-979A-079C2FBB83B9}"/>
+                <a16:creationId xmlns:a16="http://schemas.microsoft.com/office/drawing/2014/main" id="{15C4D1C1-84B0-4279-9B7C-9323D8E66C24}"/>
               </a:ext>
             </a:extLst>
           </p:cNvPr>
@@ -2672,7 +2672,7 @@
           <p:cNvPr id="7" name="スライド番号プレースホルダー 6">
             <a:extLst>
               <a:ext uri="{FF2B5EF4-FFF2-40B4-BE49-F238E27FC236}">
-                <a16:creationId xmlns:a16="http://schemas.microsoft.com/office/drawing/2014/main" id="{DFAF6637-DA6A-B13D-8E98-F1F01B8C8ECB}"/>
+                <a16:creationId xmlns:a16="http://schemas.microsoft.com/office/drawing/2014/main" id="{3AEC4A30-99F8-57A9-F035-C9C7E37D658E}"/>
               </a:ext>
             </a:extLst>
           </p:cNvPr>
@@ -2688,7 +2688,7 @@
           <a:bodyPr/>
           <a:lstStyle/>
           <a:p>
-            <a:fld id="{6B13FFE0-42E4-41C4-B6AA-0447AC4C2603}" type="slidenum">
+            <a:fld id="{16DF39D3-CC7B-4462-83DC-337DA529A1DD}" type="slidenum">
               <a:rPr kumimoji="1" lang="ja-JP" altLang="en-US" smtClean="0"/>
               <a:t>‹#›</a:t>
             </a:fld>
@@ -2699,7 +2699,7 @@
     </p:spTree>
     <p:extLst>
       <p:ext uri="{BB962C8B-B14F-4D97-AF65-F5344CB8AC3E}">
-        <p14:creationId xmlns:p14="http://schemas.microsoft.com/office/powerpoint/2010/main" val="423719536"/>
+        <p14:creationId xmlns:p14="http://schemas.microsoft.com/office/powerpoint/2010/main" val="3090100239"/>
       </p:ext>
     </p:extLst>
   </p:cSld>
@@ -2731,7 +2731,7 @@
           <p:cNvPr id="2" name="タイトル 1">
             <a:extLst>
               <a:ext uri="{FF2B5EF4-FFF2-40B4-BE49-F238E27FC236}">
-                <a16:creationId xmlns:a16="http://schemas.microsoft.com/office/drawing/2014/main" id="{36A93EAD-7BA6-1087-098C-000C67C26DC1}"/>
+                <a16:creationId xmlns:a16="http://schemas.microsoft.com/office/drawing/2014/main" id="{74B03609-8F1C-9CFC-0979-E59D4D3A2090}"/>
               </a:ext>
             </a:extLst>
           </p:cNvPr>
@@ -2768,7 +2768,7 @@
           <p:cNvPr id="3" name="図プレースホルダー 2">
             <a:extLst>
               <a:ext uri="{FF2B5EF4-FFF2-40B4-BE49-F238E27FC236}">
-                <a16:creationId xmlns:a16="http://schemas.microsoft.com/office/drawing/2014/main" id="{04B0F6AE-0415-1338-650D-47D7364503A1}"/>
+                <a16:creationId xmlns:a16="http://schemas.microsoft.com/office/drawing/2014/main" id="{EA005D22-535C-EA62-20DD-F90249519E8F}"/>
               </a:ext>
             </a:extLst>
           </p:cNvPr>
@@ -2835,7 +2835,7 @@
           <p:cNvPr id="4" name="テキスト プレースホルダー 3">
             <a:extLst>
               <a:ext uri="{FF2B5EF4-FFF2-40B4-BE49-F238E27FC236}">
-                <a16:creationId xmlns:a16="http://schemas.microsoft.com/office/drawing/2014/main" id="{57161E27-4867-B211-40DE-74B293BD2F18}"/>
+                <a16:creationId xmlns:a16="http://schemas.microsoft.com/office/drawing/2014/main" id="{F489C2CC-3CFF-4375-79FC-9CF021ACF731}"/>
               </a:ext>
             </a:extLst>
           </p:cNvPr>
@@ -2906,7 +2906,7 @@
           <p:cNvPr id="5" name="日付プレースホルダー 4">
             <a:extLst>
               <a:ext uri="{FF2B5EF4-FFF2-40B4-BE49-F238E27FC236}">
-                <a16:creationId xmlns:a16="http://schemas.microsoft.com/office/drawing/2014/main" id="{28C98F58-B227-3B43-CF4B-EDEDF93B8D94}"/>
+                <a16:creationId xmlns:a16="http://schemas.microsoft.com/office/drawing/2014/main" id="{14DF4C6C-B406-E686-4015-D388F4D5EA9A}"/>
               </a:ext>
             </a:extLst>
           </p:cNvPr>
@@ -2922,7 +2922,7 @@
           <a:bodyPr/>
           <a:lstStyle/>
           <a:p>
-            <a:fld id="{3B398E8E-E6C4-45B5-B268-4B5D9A817247}" type="datetimeFigureOut">
+            <a:fld id="{FD2A9F25-9FF8-4956-A5C2-83668A227A81}" type="datetimeFigureOut">
               <a:rPr kumimoji="1" lang="ja-JP" altLang="en-US" smtClean="0"/>
               <a:t>2026/7/30</a:t>
             </a:fld>
@@ -2935,7 +2935,7 @@
           <p:cNvPr id="6" name="フッター プレースホルダー 5">
             <a:extLst>
               <a:ext uri="{FF2B5EF4-FFF2-40B4-BE49-F238E27FC236}">
-                <a16:creationId xmlns:a16="http://schemas.microsoft.com/office/drawing/2014/main" id="{E71DEF92-0D3F-2E2A-4227-835036E237C3}"/>
+                <a16:creationId xmlns:a16="http://schemas.microsoft.com/office/drawing/2014/main" id="{A0238577-70DD-98FD-7FE9-6E5CD0BBB755}"/>
               </a:ext>
             </a:extLst>
           </p:cNvPr>
@@ -2960,7 +2960,7 @@
           <p:cNvPr id="7" name="スライド番号プレースホルダー 6">
             <a:extLst>
               <a:ext uri="{FF2B5EF4-FFF2-40B4-BE49-F238E27FC236}">
-                <a16:creationId xmlns:a16="http://schemas.microsoft.com/office/drawing/2014/main" id="{5ED9BF16-F8AD-69E3-FC62-8E5F1482612E}"/>
+                <a16:creationId xmlns:a16="http://schemas.microsoft.com/office/drawing/2014/main" id="{CFDA6FA5-3827-EBC2-FF05-99BCBAD2B214}"/>
               </a:ext>
             </a:extLst>
           </p:cNvPr>
@@ -2976,7 +2976,7 @@
           <a:bodyPr/>
           <a:lstStyle/>
           <a:p>
-            <a:fld id="{6B13FFE0-42E4-41C4-B6AA-0447AC4C2603}" type="slidenum">
+            <a:fld id="{16DF39D3-CC7B-4462-83DC-337DA529A1DD}" type="slidenum">
               <a:rPr kumimoji="1" lang="ja-JP" altLang="en-US" smtClean="0"/>
               <a:t>‹#›</a:t>
             </a:fld>
@@ -2987,7 +2987,7 @@
     </p:spTree>
     <p:extLst>
       <p:ext uri="{BB962C8B-B14F-4D97-AF65-F5344CB8AC3E}">
-        <p14:creationId xmlns:p14="http://schemas.microsoft.com/office/powerpoint/2010/main" val="2280674763"/>
+        <p14:creationId xmlns:p14="http://schemas.microsoft.com/office/powerpoint/2010/main" val="3051045496"/>
       </p:ext>
     </p:extLst>
   </p:cSld>
@@ -3024,7 +3024,7 @@
           <p:cNvPr id="2" name="タイトル プレースホルダー 1">
             <a:extLst>
               <a:ext uri="{FF2B5EF4-FFF2-40B4-BE49-F238E27FC236}">
-                <a16:creationId xmlns:a16="http://schemas.microsoft.com/office/drawing/2014/main" id="{0603BE8C-DDAC-5227-A129-7767DB2322A7}"/>
+                <a16:creationId xmlns:a16="http://schemas.microsoft.com/office/drawing/2014/main" id="{A3D9952E-D430-A487-A09A-94A05D9A2F79}"/>
               </a:ext>
             </a:extLst>
           </p:cNvPr>
@@ -3062,7 +3062,7 @@
           <p:cNvPr id="3" name="テキスト プレースホルダー 2">
             <a:extLst>
               <a:ext uri="{FF2B5EF4-FFF2-40B4-BE49-F238E27FC236}">
-                <a16:creationId xmlns:a16="http://schemas.microsoft.com/office/drawing/2014/main" id="{130FBE31-14B0-F674-C6EA-73E042ED7E82}"/>
+                <a16:creationId xmlns:a16="http://schemas.microsoft.com/office/drawing/2014/main" id="{BC48D6C0-699E-7488-4C7D-A367D432FF5E}"/>
               </a:ext>
             </a:extLst>
           </p:cNvPr>
@@ -3161,7 +3161,7 @@
           <p:cNvPr id="4" name="日付プレースホルダー 3">
             <a:extLst>
               <a:ext uri="{FF2B5EF4-FFF2-40B4-BE49-F238E27FC236}">
-                <a16:creationId xmlns:a16="http://schemas.microsoft.com/office/drawing/2014/main" id="{27FAA381-B44F-440A-DB5C-35BD7DCCFE79}"/>
+                <a16:creationId xmlns:a16="http://schemas.microsoft.com/office/drawing/2014/main" id="{92FBBA96-433B-3ED4-D515-27D2AEF06950}"/>
               </a:ext>
             </a:extLst>
           </p:cNvPr>
@@ -3195,7 +3195,7 @@
             </a:lvl1pPr>
           </a:lstStyle>
           <a:p>
-            <a:fld id="{3B398E8E-E6C4-45B5-B268-4B5D9A817247}" type="datetimeFigureOut">
+            <a:fld id="{FD2A9F25-9FF8-4956-A5C2-83668A227A81}" type="datetimeFigureOut">
               <a:rPr kumimoji="1" lang="ja-JP" altLang="en-US" smtClean="0"/>
               <a:t>2026/7/30</a:t>
             </a:fld>
@@ -3208,7 +3208,7 @@
           <p:cNvPr id="5" name="フッター プレースホルダー 4">
             <a:extLst>
               <a:ext uri="{FF2B5EF4-FFF2-40B4-BE49-F238E27FC236}">
-                <a16:creationId xmlns:a16="http://schemas.microsoft.com/office/drawing/2014/main" id="{15485A70-80EF-BB19-E137-AB5D2A888F97}"/>
+                <a16:creationId xmlns:a16="http://schemas.microsoft.com/office/drawing/2014/main" id="{07D96F29-BAAA-8F35-E790-6AB247EC9954}"/>
               </a:ext>
             </a:extLst>
           </p:cNvPr>
@@ -3251,7 +3251,7 @@
           <p:cNvPr id="6" name="スライド番号プレースホルダー 5">
             <a:extLst>
               <a:ext uri="{FF2B5EF4-FFF2-40B4-BE49-F238E27FC236}">
-                <a16:creationId xmlns:a16="http://schemas.microsoft.com/office/drawing/2014/main" id="{F7ECAE10-DE96-D6AF-A033-5E7AEBEE7254}"/>
+                <a16:creationId xmlns:a16="http://schemas.microsoft.com/office/drawing/2014/main" id="{21E39396-EEBD-3B1B-839D-A0F2C549EC4F}"/>
               </a:ext>
             </a:extLst>
           </p:cNvPr>
@@ -3285,7 +3285,7 @@
             </a:lvl1pPr>
           </a:lstStyle>
           <a:p>
-            <a:fld id="{6B13FFE0-42E4-41C4-B6AA-0447AC4C2603}" type="slidenum">
+            <a:fld id="{16DF39D3-CC7B-4462-83DC-337DA529A1DD}" type="slidenum">
               <a:rPr kumimoji="1" lang="ja-JP" altLang="en-US" smtClean="0"/>
               <a:t>‹#›</a:t>
             </a:fld>
@@ -3296,7 +3296,7 @@
     </p:spTree>
     <p:extLst>
       <p:ext uri="{BB962C8B-B14F-4D97-AF65-F5344CB8AC3E}">
-        <p14:creationId xmlns:p14="http://schemas.microsoft.com/office/powerpoint/2010/main" val="89046417"/>
+        <p14:creationId xmlns:p14="http://schemas.microsoft.com/office/powerpoint/2010/main" val="947882404"/>
       </p:ext>
     </p:extLst>
   </p:cSld>
@@ -3619,7 +3619,7 @@
           <p:cNvPr id="2" name="テキスト ボックス 1">
             <a:extLst>
               <a:ext uri="{FF2B5EF4-FFF2-40B4-BE49-F238E27FC236}">
-                <a16:creationId xmlns:a16="http://schemas.microsoft.com/office/drawing/2014/main" id="{62723B92-4836-EEC5-0A2E-3620ECD1213D}"/>
+                <a16:creationId xmlns:a16="http://schemas.microsoft.com/office/drawing/2014/main" id="{71E70A0B-C079-1905-C723-FE08C15DB45F}"/>
               </a:ext>
             </a:extLst>
           </p:cNvPr>
@@ -3665,7 +3665,7 @@
           <p:cNvPr id="3" name="テキスト ボックス 2">
             <a:extLst>
               <a:ext uri="{FF2B5EF4-FFF2-40B4-BE49-F238E27FC236}">
-                <a16:creationId xmlns:a16="http://schemas.microsoft.com/office/drawing/2014/main" id="{7BE71435-A789-B55C-D8D6-20F1E099A9CF}"/>
+                <a16:creationId xmlns:a16="http://schemas.microsoft.com/office/drawing/2014/main" id="{B5125725-69C2-18BF-F50B-1433D7332C2C}"/>
               </a:ext>
             </a:extLst>
           </p:cNvPr>
@@ -3714,7 +3714,7 @@
           <p:cNvPr id="4" name="テキスト ボックス 3">
             <a:extLst>
               <a:ext uri="{FF2B5EF4-FFF2-40B4-BE49-F238E27FC236}">
-                <a16:creationId xmlns:a16="http://schemas.microsoft.com/office/drawing/2014/main" id="{28232915-B138-09C3-F354-89086C862361}"/>
+                <a16:creationId xmlns:a16="http://schemas.microsoft.com/office/drawing/2014/main" id="{64DA65ED-50B2-96D2-0548-485A9AC91EAB}"/>
               </a:ext>
             </a:extLst>
           </p:cNvPr>
@@ -3754,7 +3754,7 @@
           <p:cNvPr id="5" name="テキスト ボックス 4">
             <a:extLst>
               <a:ext uri="{FF2B5EF4-FFF2-40B4-BE49-F238E27FC236}">
-                <a16:creationId xmlns:a16="http://schemas.microsoft.com/office/drawing/2014/main" id="{E9AB9379-79B2-CA6E-7F22-97622E0AD321}"/>
+                <a16:creationId xmlns:a16="http://schemas.microsoft.com/office/drawing/2014/main" id="{96AF8CB4-05D6-B028-FD4E-5899027C26FE}"/>
               </a:ext>
             </a:extLst>
           </p:cNvPr>
@@ -3801,7 +3801,7 @@
             <a:hlinkClick r:id="" action="ppaction://media"/>
             <a:extLst>
               <a:ext uri="{FF2B5EF4-FFF2-40B4-BE49-F238E27FC236}">
-                <a16:creationId xmlns:a16="http://schemas.microsoft.com/office/drawing/2014/main" id="{B8228EB9-47EA-17A8-21BB-EED163175DA4}"/>
+                <a16:creationId xmlns:a16="http://schemas.microsoft.com/office/drawing/2014/main" id="{58551B90-C9F0-37A3-D0A0-4463CC1E7F91}"/>
               </a:ext>
             </a:extLst>
           </p:cNvPr>
@@ -3836,7 +3836,7 @@
     </p:spTree>
     <p:extLst>
       <p:ext uri="{BB962C8B-B14F-4D97-AF65-F5344CB8AC3E}">
-        <p14:creationId xmlns:p14="http://schemas.microsoft.com/office/powerpoint/2010/main" val="1794233051"/>
+        <p14:creationId xmlns:p14="http://schemas.microsoft.com/office/powerpoint/2010/main" val="2046207621"/>
       </p:ext>
     </p:extLst>
   </p:cSld>
@@ -3960,7 +3960,7 @@
           <p:cNvPr id="2" name="テキスト ボックス 1">
             <a:extLst>
               <a:ext uri="{FF2B5EF4-FFF2-40B4-BE49-F238E27FC236}">
-                <a16:creationId xmlns:a16="http://schemas.microsoft.com/office/drawing/2014/main" id="{1EA8B07D-0178-745D-FF0B-CFA4439AAEB8}"/>
+                <a16:creationId xmlns:a16="http://schemas.microsoft.com/office/drawing/2014/main" id="{56AB290B-6CCC-442A-DE84-489FC08885A3}"/>
               </a:ext>
             </a:extLst>
           </p:cNvPr>
@@ -4006,7 +4006,7 @@
           <p:cNvPr id="3" name="テキスト ボックス 2">
             <a:extLst>
               <a:ext uri="{FF2B5EF4-FFF2-40B4-BE49-F238E27FC236}">
-                <a16:creationId xmlns:a16="http://schemas.microsoft.com/office/drawing/2014/main" id="{C61F3320-E149-AF2F-1FAD-F00A5E53773E}"/>
+                <a16:creationId xmlns:a16="http://schemas.microsoft.com/office/drawing/2014/main" id="{96CB574D-79EF-5DA2-9E27-322EF2775B3E}"/>
               </a:ext>
             </a:extLst>
           </p:cNvPr>
@@ -4046,7 +4046,7 @@
           <p:cNvPr id="4" name="テキスト ボックス 3">
             <a:extLst>
               <a:ext uri="{FF2B5EF4-FFF2-40B4-BE49-F238E27FC236}">
-                <a16:creationId xmlns:a16="http://schemas.microsoft.com/office/drawing/2014/main" id="{66537DED-02EB-FDB5-3EE8-34B810E56202}"/>
+                <a16:creationId xmlns:a16="http://schemas.microsoft.com/office/drawing/2014/main" id="{F084B043-DF38-9708-56B6-04E63AA60C4E}"/>
               </a:ext>
             </a:extLst>
           </p:cNvPr>
@@ -4076,14 +4076,17 @@
                 </a:solidFill>
                 <a:latin typeface="Arial" panose="020B0604020202020204" pitchFamily="34" charset="0"/>
               </a:rPr>
-              <a:t>vinext starter A clean full stack starter running on vinext https://github</a:t>
-            </a:r>
-            <a:endParaRPr kumimoji="1" lang="ja-JP" altLang="en-US" sz="2000">
-              <a:solidFill>
-                <a:srgbClr val="333333"/>
-              </a:solidFill>
-              <a:latin typeface="Arial" panose="020B0604020202020204" pitchFamily="34" charset="0"/>
-            </a:endParaRPr>
+              <a:t>Akira Special</a:t>
+            </a:r>
+            <a:r>
+              <a:rPr kumimoji="1" lang="ja-JP" altLang="en-US" sz="2000">
+                <a:solidFill>
+                  <a:srgbClr val="333333"/>
+                </a:solidFill>
+                <a:latin typeface="Arial" panose="020B0604020202020204" pitchFamily="34" charset="0"/>
+              </a:rPr>
+              <a:t>の目的、構成、実装を公開コードから確認できるプロジェクトです。</a:t>
+            </a:r>
           </a:p>
         </p:txBody>
       </p:sp>
@@ -4092,7 +4095,7 @@
           <p:cNvPr id="5" name="テキスト ボックス 4">
             <a:extLst>
               <a:ext uri="{FF2B5EF4-FFF2-40B4-BE49-F238E27FC236}">
-                <a16:creationId xmlns:a16="http://schemas.microsoft.com/office/drawing/2014/main" id="{388A5CE9-7C46-52B6-54F1-911C74A9AD08}"/>
+                <a16:creationId xmlns:a16="http://schemas.microsoft.com/office/drawing/2014/main" id="{F4C820D3-7D9B-22AD-FA23-8C07C4928D85}"/>
               </a:ext>
             </a:extLst>
           </p:cNvPr>
@@ -4139,7 +4142,7 @@
             <a:hlinkClick r:id="" action="ppaction://media"/>
             <a:extLst>
               <a:ext uri="{FF2B5EF4-FFF2-40B4-BE49-F238E27FC236}">
-                <a16:creationId xmlns:a16="http://schemas.microsoft.com/office/drawing/2014/main" id="{E94715E5-3669-A6A6-9EE7-D39F38285449}"/>
+                <a16:creationId xmlns:a16="http://schemas.microsoft.com/office/drawing/2014/main" id="{AD690C8D-9E33-2AAA-6052-C5B3A0F407AE}"/>
               </a:ext>
             </a:extLst>
           </p:cNvPr>
@@ -4174,7 +4177,7 @@
     </p:spTree>
     <p:extLst>
       <p:ext uri="{BB962C8B-B14F-4D97-AF65-F5344CB8AC3E}">
-        <p14:creationId xmlns:p14="http://schemas.microsoft.com/office/powerpoint/2010/main" val="3087594442"/>
+        <p14:creationId xmlns:p14="http://schemas.microsoft.com/office/powerpoint/2010/main" val="610836906"/>
       </p:ext>
     </p:extLst>
   </p:cSld>
@@ -4217,7 +4220,7 @@
                                   <p:childTnLst>
                                     <p:cmd type="call" cmd="playFrom(0.0)">
                                       <p:cBhvr>
-                                        <p:cTn id="6" dur="7955" fill="hold"/>
+                                        <p:cTn id="6" dur="7226" fill="hold"/>
                                         <p:tgtEl>
                                           <p:spTgt spid="6"/>
                                         </p:tgtEl>
@@ -4298,7 +4301,7 @@
           <p:cNvPr id="2" name="テキスト ボックス 1">
             <a:extLst>
               <a:ext uri="{FF2B5EF4-FFF2-40B4-BE49-F238E27FC236}">
-                <a16:creationId xmlns:a16="http://schemas.microsoft.com/office/drawing/2014/main" id="{B0F9CD23-B23C-4B43-7F22-39CF0AADA7EF}"/>
+                <a16:creationId xmlns:a16="http://schemas.microsoft.com/office/drawing/2014/main" id="{0D8CFD92-16DB-2075-A293-D2A37841158F}"/>
               </a:ext>
             </a:extLst>
           </p:cNvPr>
@@ -4344,7 +4347,7 @@
           <p:cNvPr id="3" name="テキスト ボックス 2">
             <a:extLst>
               <a:ext uri="{FF2B5EF4-FFF2-40B4-BE49-F238E27FC236}">
-                <a16:creationId xmlns:a16="http://schemas.microsoft.com/office/drawing/2014/main" id="{BA121022-87BB-2BB4-208D-9CF98BF22643}"/>
+                <a16:creationId xmlns:a16="http://schemas.microsoft.com/office/drawing/2014/main" id="{9D471A1B-FFEF-873F-EF9C-D3FA5C54E50C}"/>
               </a:ext>
             </a:extLst>
           </p:cNvPr>
@@ -4384,7 +4387,7 @@
           <p:cNvPr id="4" name="テキスト ボックス 3">
             <a:extLst>
               <a:ext uri="{FF2B5EF4-FFF2-40B4-BE49-F238E27FC236}">
-                <a16:creationId xmlns:a16="http://schemas.microsoft.com/office/drawing/2014/main" id="{99C3FE5B-9B01-801D-63BA-57398224577C}"/>
+                <a16:creationId xmlns:a16="http://schemas.microsoft.com/office/drawing/2014/main" id="{87C8A2AC-22D1-24BF-E7ED-1179279ACAA3}"/>
               </a:ext>
             </a:extLst>
           </p:cNvPr>
@@ -4479,7 +4482,7 @@
           <p:cNvPr id="5" name="テキスト ボックス 4">
             <a:extLst>
               <a:ext uri="{FF2B5EF4-FFF2-40B4-BE49-F238E27FC236}">
-                <a16:creationId xmlns:a16="http://schemas.microsoft.com/office/drawing/2014/main" id="{C1AA86F6-CB7E-5860-680B-EC858706C366}"/>
+                <a16:creationId xmlns:a16="http://schemas.microsoft.com/office/drawing/2014/main" id="{F9AEEEAE-8B5C-71FD-E1F2-768C7843281D}"/>
               </a:ext>
             </a:extLst>
           </p:cNvPr>
@@ -4526,7 +4529,7 @@
             <a:hlinkClick r:id="" action="ppaction://media"/>
             <a:extLst>
               <a:ext uri="{FF2B5EF4-FFF2-40B4-BE49-F238E27FC236}">
-                <a16:creationId xmlns:a16="http://schemas.microsoft.com/office/drawing/2014/main" id="{9B6E10A0-CACE-4286-5A6B-9E0FB5C9164D}"/>
+                <a16:creationId xmlns:a16="http://schemas.microsoft.com/office/drawing/2014/main" id="{D3F63154-5AF5-1171-3E27-D37015019728}"/>
               </a:ext>
             </a:extLst>
           </p:cNvPr>
@@ -4561,7 +4564,7 @@
     </p:spTree>
     <p:extLst>
       <p:ext uri="{BB962C8B-B14F-4D97-AF65-F5344CB8AC3E}">
-        <p14:creationId xmlns:p14="http://schemas.microsoft.com/office/powerpoint/2010/main" val="3721589284"/>
+        <p14:creationId xmlns:p14="http://schemas.microsoft.com/office/powerpoint/2010/main" val="1362509202"/>
       </p:ext>
     </p:extLst>
   </p:cSld>
@@ -4685,7 +4688,7 @@
           <p:cNvPr id="2" name="テキスト ボックス 1">
             <a:extLst>
               <a:ext uri="{FF2B5EF4-FFF2-40B4-BE49-F238E27FC236}">
-                <a16:creationId xmlns:a16="http://schemas.microsoft.com/office/drawing/2014/main" id="{B460D4A0-7C3B-326D-BC45-97C9739FDCD9}"/>
+                <a16:creationId xmlns:a16="http://schemas.microsoft.com/office/drawing/2014/main" id="{6671D8D7-8F1F-5B94-60B4-82F1D162CA85}"/>
               </a:ext>
             </a:extLst>
           </p:cNvPr>
@@ -4731,7 +4734,7 @@
           <p:cNvPr id="3" name="テキスト ボックス 2">
             <a:extLst>
               <a:ext uri="{FF2B5EF4-FFF2-40B4-BE49-F238E27FC236}">
-                <a16:creationId xmlns:a16="http://schemas.microsoft.com/office/drawing/2014/main" id="{77EE8650-5244-3C08-43FF-7A8C4C0CC9E7}"/>
+                <a16:creationId xmlns:a16="http://schemas.microsoft.com/office/drawing/2014/main" id="{A7664047-46E4-6923-4AEF-945AC90B9DEE}"/>
               </a:ext>
             </a:extLst>
           </p:cNvPr>
@@ -4771,7 +4774,7 @@
           <p:cNvPr id="4" name="テキスト ボックス 3">
             <a:extLst>
               <a:ext uri="{FF2B5EF4-FFF2-40B4-BE49-F238E27FC236}">
-                <a16:creationId xmlns:a16="http://schemas.microsoft.com/office/drawing/2014/main" id="{8F92EB68-6499-1E8E-01C0-E9A939017B08}"/>
+                <a16:creationId xmlns:a16="http://schemas.microsoft.com/office/drawing/2014/main" id="{8889D3E1-698F-B495-53E0-717E3313A69F}"/>
               </a:ext>
             </a:extLst>
           </p:cNvPr>
@@ -4881,7 +4884,7 @@
           <p:cNvPr id="5" name="テキスト ボックス 4">
             <a:extLst>
               <a:ext uri="{FF2B5EF4-FFF2-40B4-BE49-F238E27FC236}">
-                <a16:creationId xmlns:a16="http://schemas.microsoft.com/office/drawing/2014/main" id="{918DAF41-452E-A4D2-27D0-5798C4FE4E18}"/>
+                <a16:creationId xmlns:a16="http://schemas.microsoft.com/office/drawing/2014/main" id="{A478F1D8-C69D-B8E3-2383-397FAF7D32B7}"/>
               </a:ext>
             </a:extLst>
           </p:cNvPr>
@@ -4928,7 +4931,7 @@
             <a:hlinkClick r:id="" action="ppaction://media"/>
             <a:extLst>
               <a:ext uri="{FF2B5EF4-FFF2-40B4-BE49-F238E27FC236}">
-                <a16:creationId xmlns:a16="http://schemas.microsoft.com/office/drawing/2014/main" id="{1F7CD9E9-AFC4-E298-F468-38F614BBAD9D}"/>
+                <a16:creationId xmlns:a16="http://schemas.microsoft.com/office/drawing/2014/main" id="{EB02A0F3-8449-21F3-344D-C4B96EFBC9C1}"/>
               </a:ext>
             </a:extLst>
           </p:cNvPr>
@@ -4963,7 +4966,7 @@
     </p:spTree>
     <p:extLst>
       <p:ext uri="{BB962C8B-B14F-4D97-AF65-F5344CB8AC3E}">
-        <p14:creationId xmlns:p14="http://schemas.microsoft.com/office/powerpoint/2010/main" val="2998322304"/>
+        <p14:creationId xmlns:p14="http://schemas.microsoft.com/office/powerpoint/2010/main" val="1561500571"/>
       </p:ext>
     </p:extLst>
   </p:cSld>
@@ -5087,7 +5090,7 @@
           <p:cNvPr id="2" name="テキスト ボックス 1">
             <a:extLst>
               <a:ext uri="{FF2B5EF4-FFF2-40B4-BE49-F238E27FC236}">
-                <a16:creationId xmlns:a16="http://schemas.microsoft.com/office/drawing/2014/main" id="{A812339D-4806-CC4D-B022-53288A4D68F9}"/>
+                <a16:creationId xmlns:a16="http://schemas.microsoft.com/office/drawing/2014/main" id="{B0DE3A51-641F-D0B7-4A95-DC31D08D83AB}"/>
               </a:ext>
             </a:extLst>
           </p:cNvPr>
@@ -5133,7 +5136,7 @@
           <p:cNvPr id="3" name="テキスト ボックス 2">
             <a:extLst>
               <a:ext uri="{FF2B5EF4-FFF2-40B4-BE49-F238E27FC236}">
-                <a16:creationId xmlns:a16="http://schemas.microsoft.com/office/drawing/2014/main" id="{05416777-0FB2-A40D-D158-53FF7887889B}"/>
+                <a16:creationId xmlns:a16="http://schemas.microsoft.com/office/drawing/2014/main" id="{00E0FEBF-C483-69F4-3AA4-8F5D35926808}"/>
               </a:ext>
             </a:extLst>
           </p:cNvPr>
@@ -5173,7 +5176,7 @@
           <p:cNvPr id="4" name="テキスト ボックス 3">
             <a:extLst>
               <a:ext uri="{FF2B5EF4-FFF2-40B4-BE49-F238E27FC236}">
-                <a16:creationId xmlns:a16="http://schemas.microsoft.com/office/drawing/2014/main" id="{6A747F54-27EB-427F-68DC-EE61FCF8A897}"/>
+                <a16:creationId xmlns:a16="http://schemas.microsoft.com/office/drawing/2014/main" id="{F3207110-9554-9BB3-8D79-E88D33455F13}"/>
               </a:ext>
             </a:extLst>
           </p:cNvPr>
@@ -5197,20 +5200,14 @@
           <a:lstStyle/>
           <a:p>
             <a:r>
-              <a:rPr kumimoji="1" lang="en-US" altLang="ja-JP" sz="2000">
+              <a:rPr kumimoji="1" lang="ja-JP" altLang="en-US" sz="2000">
                 <a:solidFill>
                   <a:srgbClr val="333333"/>
                 </a:solidFill>
                 <a:latin typeface="Arial" panose="020B0604020202020204" pitchFamily="34" charset="0"/>
               </a:rPr>
-              <a:t>Improve beginner arcade-stick UX in app/globals.css</a:t>
-            </a:r>
-            <a:endParaRPr kumimoji="1" lang="ja-JP" altLang="en-US" sz="2000">
-              <a:solidFill>
-                <a:srgbClr val="333333"/>
-              </a:solidFill>
-              <a:latin typeface="Arial" panose="020B0604020202020204" pitchFamily="34" charset="0"/>
-            </a:endParaRPr>
+              <a:t>直近のコミットでは、構成の更新と保守性の改善が行われました。</a:t>
+            </a:r>
           </a:p>
         </p:txBody>
       </p:sp>
@@ -5219,7 +5216,7 @@
           <p:cNvPr id="5" name="テキスト ボックス 4">
             <a:extLst>
               <a:ext uri="{FF2B5EF4-FFF2-40B4-BE49-F238E27FC236}">
-                <a16:creationId xmlns:a16="http://schemas.microsoft.com/office/drawing/2014/main" id="{4545D931-E050-B550-551E-3C5927B93A1C}"/>
+                <a16:creationId xmlns:a16="http://schemas.microsoft.com/office/drawing/2014/main" id="{5D8DA428-F435-7D36-454A-A0C2F21A3E7F}"/>
               </a:ext>
             </a:extLst>
           </p:cNvPr>
@@ -5266,7 +5263,7 @@
             <a:hlinkClick r:id="" action="ppaction://media"/>
             <a:extLst>
               <a:ext uri="{FF2B5EF4-FFF2-40B4-BE49-F238E27FC236}">
-                <a16:creationId xmlns:a16="http://schemas.microsoft.com/office/drawing/2014/main" id="{3F327351-2153-ABE2-CF85-43F7959912E1}"/>
+                <a16:creationId xmlns:a16="http://schemas.microsoft.com/office/drawing/2014/main" id="{EE841222-8943-F45B-F3A2-9BA7E01F7B2F}"/>
               </a:ext>
             </a:extLst>
           </p:cNvPr>
@@ -5301,7 +5298,7 @@
     </p:spTree>
     <p:extLst>
       <p:ext uri="{BB962C8B-B14F-4D97-AF65-F5344CB8AC3E}">
-        <p14:creationId xmlns:p14="http://schemas.microsoft.com/office/powerpoint/2010/main" val="698749732"/>
+        <p14:creationId xmlns:p14="http://schemas.microsoft.com/office/powerpoint/2010/main" val="2192571691"/>
       </p:ext>
     </p:extLst>
   </p:cSld>
@@ -5310,10 +5307,10 @@
   </p:clrMapOvr>
   <mc:AlternateContent xmlns:mc="http://schemas.openxmlformats.org/markup-compatibility/2006">
     <mc:Choice xmlns:p14="http://schemas.microsoft.com/office/powerpoint/2010/main" Requires="p14">
-      <p:transition spd="slow" p14:dur="2000" advTm="9000"/>
+      <p:transition spd="slow" p14:dur="2000" advTm="7000"/>
     </mc:Choice>
     <mc:Fallback>
-      <p:transition spd="slow" advTm="9000"/>
+      <p:transition spd="slow" advTm="7000"/>
     </mc:Fallback>
   </mc:AlternateContent>
   <p:timing>
@@ -5344,7 +5341,7 @@
                                   <p:childTnLst>
                                     <p:cmd type="call" cmd="playFrom(0.0)">
                                       <p:cBhvr>
-                                        <p:cTn id="6" dur="8970" fill="hold"/>
+                                        <p:cTn id="6" dur="6036" fill="hold"/>
                                         <p:tgtEl>
                                           <p:spTgt spid="6"/>
                                         </p:tgtEl>
@@ -5425,7 +5422,7 @@
           <p:cNvPr id="2" name="テキスト ボックス 1">
             <a:extLst>
               <a:ext uri="{FF2B5EF4-FFF2-40B4-BE49-F238E27FC236}">
-                <a16:creationId xmlns:a16="http://schemas.microsoft.com/office/drawing/2014/main" id="{829B1977-18AF-98FB-8ACA-5BF41AA8F909}"/>
+                <a16:creationId xmlns:a16="http://schemas.microsoft.com/office/drawing/2014/main" id="{6A15C89B-B602-6113-B1FF-3CAB9836B916}"/>
               </a:ext>
             </a:extLst>
           </p:cNvPr>
@@ -5471,7 +5468,7 @@
           <p:cNvPr id="3" name="テキスト ボックス 2">
             <a:extLst>
               <a:ext uri="{FF2B5EF4-FFF2-40B4-BE49-F238E27FC236}">
-                <a16:creationId xmlns:a16="http://schemas.microsoft.com/office/drawing/2014/main" id="{AE6D21A0-AF11-7432-7F1B-2BD8071C18D0}"/>
+                <a16:creationId xmlns:a16="http://schemas.microsoft.com/office/drawing/2014/main" id="{5248F7CD-0725-F58C-9DD4-217B66DC5E8D}"/>
               </a:ext>
             </a:extLst>
           </p:cNvPr>
@@ -5511,7 +5508,7 @@
           <p:cNvPr id="4" name="テキスト ボックス 3">
             <a:extLst>
               <a:ext uri="{FF2B5EF4-FFF2-40B4-BE49-F238E27FC236}">
-                <a16:creationId xmlns:a16="http://schemas.microsoft.com/office/drawing/2014/main" id="{70FCF395-70A1-F184-C030-99856634C240}"/>
+                <a16:creationId xmlns:a16="http://schemas.microsoft.com/office/drawing/2014/main" id="{760DAA49-567C-8768-49DA-7FBACB6FBF2C}"/>
               </a:ext>
             </a:extLst>
           </p:cNvPr>
@@ -5576,7 +5573,7 @@
           <p:cNvPr id="5" name="テキスト ボックス 4">
             <a:extLst>
               <a:ext uri="{FF2B5EF4-FFF2-40B4-BE49-F238E27FC236}">
-                <a16:creationId xmlns:a16="http://schemas.microsoft.com/office/drawing/2014/main" id="{6599E858-95B9-7426-115D-BA8040758E2C}"/>
+                <a16:creationId xmlns:a16="http://schemas.microsoft.com/office/drawing/2014/main" id="{DF94DD7C-7536-6205-C9E7-90581E86BB22}"/>
               </a:ext>
             </a:extLst>
           </p:cNvPr>
@@ -5623,7 +5620,7 @@
             <a:hlinkClick r:id="" action="ppaction://media"/>
             <a:extLst>
               <a:ext uri="{FF2B5EF4-FFF2-40B4-BE49-F238E27FC236}">
-                <a16:creationId xmlns:a16="http://schemas.microsoft.com/office/drawing/2014/main" id="{BF262257-1509-6409-A94E-6825879A2365}"/>
+                <a16:creationId xmlns:a16="http://schemas.microsoft.com/office/drawing/2014/main" id="{0BD1603F-7572-0E5C-8929-1FE36CC1D7C6}"/>
               </a:ext>
             </a:extLst>
           </p:cNvPr>
@@ -5658,7 +5655,7 @@
     </p:spTree>
     <p:extLst>
       <p:ext uri="{BB962C8B-B14F-4D97-AF65-F5344CB8AC3E}">
-        <p14:creationId xmlns:p14="http://schemas.microsoft.com/office/powerpoint/2010/main" val="4156752057"/>
+        <p14:creationId xmlns:p14="http://schemas.microsoft.com/office/powerpoint/2010/main" val="696322171"/>
       </p:ext>
     </p:extLst>
   </p:cSld>
